--- a/docs/EGPA-Overview.pptx
+++ b/docs/EGPA-Overview.pptx
@@ -22,10 +22,9 @@
     <p:sldId id="270" r:id="rId16"/>
     <p:sldId id="271" r:id="rId17"/>
     <p:sldId id="272" r:id="rId18"/>
-    <p:sldId id="273" r:id="rId19"/>
   </p:sldIdLst>
   <p:notesMasterIdLst>
-    <p:notesMasterId r:id="rId20"/>
+    <p:notesMasterId r:id="rId19"/>
   </p:notesMasterIdLst>
   <p:sldSz cx="12192000" cy="6858000"/>
   <p:notesSz cx="6858000" cy="12192000"/>
@@ -1247,94 +1246,6 @@
             <a:fld id="{F7021451-1387-4CA6-816F-3879F97B5CBC}" type="slidenum">
               <a:rPr lang="en-US"/>
               <a:t>17</a:t>
-            </a:fld>
-            <a:endParaRPr lang="en-US"/>
-          </a:p>
-        </p:txBody>
-      </p:sp>
-    </p:spTree>
-    <p:extLst>
-      <p:ext uri="{BB962C8B-B14F-4D97-AF65-F5344CB8AC3E}">
-        <p14:creationId xmlns:p14="http://schemas.microsoft.com/office/powerpoint/2010/main" val="1024086991"/>
-      </p:ext>
-    </p:extLst>
-  </p:cSld>
-  <p:clrMapOvr>
-    <a:masterClrMapping/>
-  </p:clrMapOvr>
-</p:notes>
-</file>
-
-<file path=ppt/notesSlides/notesSlide18.xml><?xml version="1.0" encoding="utf-8"?>
-<p:notes xmlns:a="http://schemas.openxmlformats.org/drawingml/2006/main" xmlns:r="http://schemas.openxmlformats.org/officeDocument/2006/relationships" xmlns:p="http://schemas.openxmlformats.org/presentationml/2006/main">
-  <p:cSld>
-    <p:spTree>
-      <p:nvGrpSpPr>
-        <p:cNvPr id="1" name=""/>
-        <p:cNvGrpSpPr/>
-        <p:nvPr/>
-      </p:nvGrpSpPr>
-      <p:grpSpPr>
-        <a:xfrm>
-          <a:off x="0" y="0"/>
-          <a:ext cx="0" cy="0"/>
-          <a:chOff x="0" y="0"/>
-          <a:chExt cx="0" cy="0"/>
-        </a:xfrm>
-      </p:grpSpPr>
-      <p:sp>
-        <p:nvSpPr>
-          <p:cNvPr id="2" name="Slide Image Placeholder 1"/>
-          <p:cNvSpPr>
-            <a:spLocks noGrp="1" noRot="1" noChangeAspect="1"/>
-          </p:cNvSpPr>
-          <p:nvPr>
-            <p:ph type="sldImg"/>
-          </p:nvPr>
-        </p:nvSpPr>
-        <p:spPr/>
-      </p:sp>
-      <p:sp>
-        <p:nvSpPr>
-          <p:cNvPr id="3" name="Notes Placeholder 2"/>
-          <p:cNvSpPr>
-            <a:spLocks noGrp="1"/>
-          </p:cNvSpPr>
-          <p:nvPr>
-            <p:ph type="body" idx="1"/>
-          </p:nvPr>
-        </p:nvSpPr>
-        <p:spPr/>
-        <p:txBody>
-          <a:bodyPr/>
-          <a:lstStyle/>
-          <a:p>
-            <a:r>
-              <a:rPr lang="en-US" dirty="0"/>
-              <a:t/>
-            </a:r>
-            <a:endParaRPr lang="en-US" dirty="0"/>
-          </a:p>
-        </p:txBody>
-      </p:sp>
-      <p:sp>
-        <p:nvSpPr>
-          <p:cNvPr id="4" name="Slide Number Placeholder 3"/>
-          <p:cNvSpPr>
-            <a:spLocks noGrp="1"/>
-          </p:cNvSpPr>
-          <p:nvPr>
-            <p:ph type="sldNum" sz="quarter" idx="10"/>
-          </p:nvPr>
-        </p:nvSpPr>
-        <p:spPr/>
-        <p:txBody>
-          <a:bodyPr/>
-          <a:lstStyle/>
-          <a:p>
-            <a:fld id="{F7021451-1387-4CA6-816F-3879F97B5CBC}" type="slidenum">
-              <a:rPr lang="en-US"/>
-              <a:t>18</a:t>
             </a:fld>
             <a:endParaRPr lang="en-US"/>
           </a:p>
@@ -4095,7 +4006,7 @@
                 <a:ea typeface="Calibri" pitchFamily="34" charset="-122"/>
                 <a:cs typeface="Calibri" pitchFamily="34" charset="-120"/>
               </a:rPr>
-              <a:t>End-to-end view · Every layer real and deployed · No layer simulated for this diagram</a:t>
+              <a:t>End-to-end view · Every layer real, deployed, and named — the full technology stack in one diagram</a:t>
             </a:r>
             <a:endParaRPr lang="en-US" sz="1250" dirty="0"/>
           </a:p>
@@ -4363,7 +4274,7 @@
                 <a:ea typeface="Calibri" pitchFamily="34" charset="-122"/>
                 <a:cs typeface="Calibri" pitchFamily="34" charset="-120"/>
               </a:rPr>
-              <a:t>→ Next.js 16 App Router</a:t>
+              <a:t>→ Next.js 16, React 19, TypeScript, Tailwind v4</a:t>
             </a:r>
             <a:endParaRPr lang="en-US" sz="1100" dirty="0"/>
           </a:p>
@@ -4551,7 +4462,7 @@
                 <a:ea typeface="Calibri" pitchFamily="34" charset="-122"/>
                 <a:cs typeface="Calibri" pitchFamily="34" charset="-120"/>
               </a:rPr>
-              <a:t>→ Self-hosted LiteLLM Proxy</a:t>
+              <a:t>→ Self-hosted LiteLLM Proxy (Cloud Run)</a:t>
             </a:r>
             <a:endParaRPr lang="en-US" sz="1100" dirty="0"/>
           </a:p>
@@ -4591,7 +4502,7 @@
                 <a:ea typeface="Calibri" pitchFamily="34" charset="-122"/>
                 <a:cs typeface="Calibri" pitchFamily="34" charset="-120"/>
               </a:rPr>
-              <a:t>→ LangGraph sub-agent execution</a:t>
+              <a:t>→ LangGraph + LangChain sub-agent execution</a:t>
             </a:r>
             <a:endParaRPr lang="en-US" sz="1100" dirty="0"/>
           </a:p>
@@ -8514,7 +8425,7 @@
                 <a:ea typeface="Calibri" pitchFamily="34" charset="-122"/>
                 <a:cs typeface="Calibri" pitchFamily="34" charset="-120"/>
               </a:rPr>
-              <a:t>TECHNOLOGY STACK</a:t>
+              <a:t>PHASED IMPLEMENTATION</a:t>
             </a:r>
             <a:endParaRPr lang="en-US" sz="1200" dirty="0"/>
           </a:p>
@@ -8529,23 +8440,23 @@
         <p:spPr>
           <a:xfrm>
             <a:off x="548640" y="822960"/>
-            <a:ext cx="10058400" cy="914400"/>
-          </a:xfrm>
-          <a:prstGeom prst="rect">
-            <a:avLst/>
-          </a:prstGeom>
-          <a:noFill/>
-          <a:ln/>
-        </p:spPr>
-        <p:txBody>
-          <a:bodyPr wrap="square" rtlCol="0" anchor="ctr"/>
-          <a:lstStyle/>
-          <a:p>
-            <a:pPr indent="0" marL="0">
-              <a:buNone/>
-            </a:pPr>
-            <a:r>
-              <a:rPr lang="en-US" sz="3000" b="1" dirty="0">
+            <a:ext cx="10972800" cy="548640"/>
+          </a:xfrm>
+          <a:prstGeom prst="rect">
+            <a:avLst/>
+          </a:prstGeom>
+          <a:noFill/>
+          <a:ln/>
+        </p:spPr>
+        <p:txBody>
+          <a:bodyPr wrap="square" rtlCol="0" anchor="ctr"/>
+          <a:lstStyle/>
+          <a:p>
+            <a:pPr indent="0" marL="0">
+              <a:buNone/>
+            </a:pPr>
+            <a:r>
+              <a:rPr lang="en-US" sz="2400" b="1" dirty="0">
                 <a:solidFill>
                   <a:srgbClr val="0A2A43"/>
                 </a:solidFill>
@@ -8553,26 +8464,65 @@
                 <a:ea typeface="Cambria" pitchFamily="34" charset="-122"/>
                 <a:cs typeface="Cambria" pitchFamily="34" charset="-120"/>
               </a:rPr>
-              <a:t>Built on real, production infrastructure</a:t>
-            </a:r>
-            <a:endParaRPr lang="en-US" sz="3000" dirty="0"/>
-          </a:p>
-        </p:txBody>
-      </p:sp>
-      <p:sp>
-        <p:nvSpPr>
-          <p:cNvPr id="4" name="Shape 2"/>
-          <p:cNvSpPr/>
-          <p:nvPr/>
-        </p:nvSpPr>
-        <p:spPr>
-          <a:xfrm>
-            <a:off x="548640" y="2103120"/>
-            <a:ext cx="3611880" cy="1554480"/>
+              <a:t>No invented dates — sequenced by what deepens governance first</a:t>
+            </a:r>
+            <a:endParaRPr lang="en-US" sz="2400" dirty="0"/>
+          </a:p>
+        </p:txBody>
+      </p:sp>
+      <p:sp>
+        <p:nvSpPr>
+          <p:cNvPr id="4" name="Text 2"/>
+          <p:cNvSpPr/>
+          <p:nvPr/>
+        </p:nvSpPr>
+        <p:spPr>
+          <a:xfrm>
+            <a:off x="548640" y="1371600"/>
+            <a:ext cx="10972800" cy="365760"/>
+          </a:xfrm>
+          <a:prstGeom prst="rect">
+            <a:avLst/>
+          </a:prstGeom>
+          <a:noFill/>
+          <a:ln/>
+        </p:spPr>
+        <p:txBody>
+          <a:bodyPr wrap="square" rtlCol="0" anchor="ctr"/>
+          <a:lstStyle/>
+          <a:p>
+            <a:pPr indent="0" marL="0">
+              <a:buNone/>
+            </a:pPr>
+            <a:r>
+              <a:rPr lang="en-US" sz="1250" i="1" dirty="0">
+                <a:solidFill>
+                  <a:srgbClr val="6B7280"/>
+                </a:solidFill>
+                <a:latin typeface="Calibri" pitchFamily="34" charset="0"/>
+                <a:ea typeface="Calibri" pitchFamily="34" charset="-122"/>
+                <a:cs typeface="Calibri" pitchFamily="34" charset="-120"/>
+              </a:rPr>
+              <a:t>A single-team roadmap can't credibly commit to a quarter, so this is grouped by sequencing, not promised timing.</a:t>
+            </a:r>
+            <a:endParaRPr lang="en-US" sz="1250" dirty="0"/>
+          </a:p>
+        </p:txBody>
+      </p:sp>
+      <p:sp>
+        <p:nvSpPr>
+          <p:cNvPr id="5" name="Shape 3"/>
+          <p:cNvSpPr/>
+          <p:nvPr/>
+        </p:nvSpPr>
+        <p:spPr>
+          <a:xfrm>
+            <a:off x="457200" y="2011680"/>
+            <a:ext cx="3611880" cy="4160520"/>
           </a:xfrm>
           <a:prstGeom prst="roundRect">
             <a:avLst>
-              <a:gd name="adj" fmla="val 5882"/>
+              <a:gd name="adj" fmla="val 2532"/>
             </a:avLst>
           </a:prstGeom>
           <a:solidFill>
@@ -8583,99 +8533,214 @@
       </p:sp>
       <p:sp>
         <p:nvSpPr>
-          <p:cNvPr id="5" name="Text 3"/>
-          <p:cNvSpPr/>
-          <p:nvPr/>
-        </p:nvSpPr>
-        <p:spPr>
-          <a:xfrm>
-            <a:off x="822960" y="2331720"/>
-            <a:ext cx="3063240" cy="457200"/>
-          </a:xfrm>
-          <a:prstGeom prst="rect">
-            <a:avLst/>
-          </a:prstGeom>
-          <a:noFill/>
-          <a:ln/>
-        </p:spPr>
-        <p:txBody>
-          <a:bodyPr wrap="square" rtlCol="0" anchor="ctr"/>
-          <a:lstStyle/>
-          <a:p>
-            <a:pPr indent="0" marL="0">
-              <a:buNone/>
-            </a:pPr>
-            <a:r>
-              <a:rPr lang="en-US" sz="1400" b="1" dirty="0">
-                <a:solidFill>
-                  <a:srgbClr val="0A2A43"/>
-                </a:solidFill>
-                <a:latin typeface="Calibri" pitchFamily="34" charset="0"/>
-                <a:ea typeface="Calibri" pitchFamily="34" charset="-122"/>
-                <a:cs typeface="Calibri" pitchFamily="34" charset="-120"/>
-              </a:rPr>
-              <a:t>Frontend</a:t>
-            </a:r>
-            <a:endParaRPr lang="en-US" sz="1400" dirty="0"/>
-          </a:p>
-        </p:txBody>
-      </p:sp>
-      <p:sp>
-        <p:nvSpPr>
-          <p:cNvPr id="6" name="Text 4"/>
-          <p:cNvSpPr/>
-          <p:nvPr/>
-        </p:nvSpPr>
-        <p:spPr>
-          <a:xfrm>
-            <a:off x="822960" y="2834640"/>
-            <a:ext cx="3063240" cy="731520"/>
-          </a:xfrm>
-          <a:prstGeom prst="rect">
-            <a:avLst/>
-          </a:prstGeom>
-          <a:noFill/>
-          <a:ln/>
-        </p:spPr>
-        <p:txBody>
-          <a:bodyPr wrap="square" rtlCol="0" anchor="ctr"/>
-          <a:lstStyle/>
-          <a:p>
-            <a:pPr indent="0" marL="0">
-              <a:lnSpc>
-                <a:spcPct val="125000"/>
-              </a:lnSpc>
-              <a:buNone/>
-            </a:pPr>
-            <a:r>
-              <a:rPr lang="en-US" sz="1150" dirty="0">
-                <a:solidFill>
-                  <a:srgbClr val="1F2937"/>
-                </a:solidFill>
-                <a:latin typeface="Calibri" pitchFamily="34" charset="0"/>
-                <a:ea typeface="Calibri" pitchFamily="34" charset="-122"/>
-                <a:cs typeface="Calibri" pitchFamily="34" charset="-120"/>
-              </a:rPr>
-              <a:t>Next.js 16, React 19, TypeScript, Tailwind v4</a:t>
-            </a:r>
-            <a:endParaRPr lang="en-US" sz="1150" dirty="0"/>
-          </a:p>
-        </p:txBody>
-      </p:sp>
-      <p:sp>
-        <p:nvSpPr>
-          <p:cNvPr id="7" name="Shape 5"/>
-          <p:cNvSpPr/>
-          <p:nvPr/>
-        </p:nvSpPr>
-        <p:spPr>
-          <a:xfrm>
-            <a:off x="4343400" y="2103120"/>
-            <a:ext cx="3611880" cy="1554480"/>
+          <p:cNvPr id="6" name="Shape 4"/>
+          <p:cNvSpPr/>
+          <p:nvPr/>
+        </p:nvSpPr>
+        <p:spPr>
+          <a:xfrm>
+            <a:off x="457200" y="2011680"/>
+            <a:ext cx="3611880" cy="502920"/>
           </a:xfrm>
           <a:prstGeom prst="roundRect">
             <a:avLst>
-              <a:gd name="adj" fmla="val 5882"/>
+              <a:gd name="adj" fmla="val 18182"/>
+            </a:avLst>
+          </a:prstGeom>
+          <a:solidFill>
+            <a:srgbClr val="1A9C94"/>
+          </a:solidFill>
+          <a:ln/>
+        </p:spPr>
+      </p:sp>
+      <p:sp>
+        <p:nvSpPr>
+          <p:cNvPr id="7" name="Shape 5"/>
+          <p:cNvSpPr/>
+          <p:nvPr/>
+        </p:nvSpPr>
+        <p:spPr>
+          <a:xfrm>
+            <a:off x="457200" y="2267712"/>
+            <a:ext cx="3611880" cy="246888"/>
+          </a:xfrm>
+          <a:prstGeom prst="rect">
+            <a:avLst/>
+          </a:prstGeom>
+          <a:solidFill>
+            <a:srgbClr val="1A9C94"/>
+          </a:solidFill>
+          <a:ln/>
+        </p:spPr>
+      </p:sp>
+      <p:sp>
+        <p:nvSpPr>
+          <p:cNvPr id="8" name="Text 6"/>
+          <p:cNvSpPr/>
+          <p:nvPr/>
+        </p:nvSpPr>
+        <p:spPr>
+          <a:xfrm>
+            <a:off x="640080" y="2011680"/>
+            <a:ext cx="3246120" cy="502920"/>
+          </a:xfrm>
+          <a:prstGeom prst="rect">
+            <a:avLst/>
+          </a:prstGeom>
+          <a:noFill/>
+          <a:ln/>
+        </p:spPr>
+        <p:txBody>
+          <a:bodyPr wrap="square" rtlCol="0" anchor="ctr"/>
+          <a:lstStyle/>
+          <a:p>
+            <a:pPr indent="0" marL="0">
+              <a:buNone/>
+            </a:pPr>
+            <a:r>
+              <a:rPr lang="en-US" sz="1150" b="1" dirty="0">
+                <a:solidFill>
+                  <a:srgbClr val="FFFFFF"/>
+                </a:solidFill>
+                <a:latin typeface="Calibri" pitchFamily="34" charset="0"/>
+                <a:ea typeface="Calibri" pitchFamily="34" charset="-122"/>
+                <a:cs typeface="Calibri" pitchFamily="34" charset="-120"/>
+              </a:rPr>
+              <a:t>DELIVERED — MVP, LIVE TODAY</a:t>
+            </a:r>
+            <a:endParaRPr lang="en-US" sz="1150" dirty="0"/>
+          </a:p>
+        </p:txBody>
+      </p:sp>
+      <p:sp>
+        <p:nvSpPr>
+          <p:cNvPr id="9" name="Text 7"/>
+          <p:cNvSpPr/>
+          <p:nvPr/>
+        </p:nvSpPr>
+        <p:spPr>
+          <a:xfrm>
+            <a:off x="658368" y="2697480"/>
+            <a:ext cx="3209544" cy="3246120"/>
+          </a:xfrm>
+          <a:prstGeom prst="rect">
+            <a:avLst/>
+          </a:prstGeom>
+          <a:noFill/>
+          <a:ln/>
+        </p:spPr>
+        <p:txBody>
+          <a:bodyPr wrap="square" rtlCol="0" anchor="ctr"/>
+          <a:lstStyle/>
+          <a:p>
+            <a:pPr marL="177800" indent="-177800">
+              <a:lnSpc>
+                <a:spcPct val="130000"/>
+              </a:lnSpc>
+              <a:spcAft>
+                <a:spcPts val="800"/>
+              </a:spcAft>
+              <a:buSzPct val="100000"/>
+              <a:buChar char="•"/>
+            </a:pPr>
+            <a:r>
+              <a:rPr lang="en-US" sz="1100" dirty="0">
+                <a:solidFill>
+                  <a:srgbClr val="1F2937"/>
+                </a:solidFill>
+                <a:latin typeface="Calibri" pitchFamily="34" charset="0"/>
+                <a:ea typeface="Calibri" pitchFamily="34" charset="-122"/>
+                <a:cs typeface="Calibri" pitchFamily="34" charset="-120"/>
+              </a:rPr>
+              <a:t>Full pipeline, Discovery through Observability</a:t>
+            </a:r>
+            <a:endParaRPr lang="en-US" sz="1100" dirty="0"/>
+          </a:p>
+          <a:p>
+            <a:pPr indent="0" marL="0">
+              <a:lnSpc>
+                <a:spcPct val="130000"/>
+              </a:lnSpc>
+              <a:spcAft>
+                <a:spcPts val="800"/>
+              </a:spcAft>
+              <a:buNone/>
+            </a:pPr>
+            <a:r>
+              <a:rPr lang="en-US" sz="1100" dirty="0">
+                <a:solidFill>
+                  <a:srgbClr val="1F2937"/>
+                </a:solidFill>
+                <a:latin typeface="Calibri" pitchFamily="34" charset="0"/>
+                <a:ea typeface="Calibri" pitchFamily="34" charset="-122"/>
+                <a:cs typeface="Calibri" pitchFamily="34" charset="-120"/>
+              </a:rPr>
+              <a:t>Real runtime governance: kill-switch, audit log, PII redaction</a:t>
+            </a:r>
+            <a:endParaRPr lang="en-US" sz="1100" dirty="0"/>
+          </a:p>
+          <a:p>
+            <a:pPr indent="0" marL="0">
+              <a:lnSpc>
+                <a:spcPct val="130000"/>
+              </a:lnSpc>
+              <a:spcAft>
+                <a:spcPts val="800"/>
+              </a:spcAft>
+              <a:buNone/>
+            </a:pPr>
+            <a:r>
+              <a:rPr lang="en-US" sz="1100" dirty="0">
+                <a:solidFill>
+                  <a:srgbClr val="1F2937"/>
+                </a:solidFill>
+                <a:latin typeface="Calibri" pitchFamily="34" charset="0"/>
+                <a:ea typeface="Calibri" pitchFamily="34" charset="-122"/>
+                <a:cs typeface="Calibri" pitchFamily="34" charset="-120"/>
+              </a:rPr>
+              <a:t>Real multi-tenancy, SSO, AI Gateway with fallback</a:t>
+            </a:r>
+            <a:endParaRPr lang="en-US" sz="1100" dirty="0"/>
+          </a:p>
+          <a:p>
+            <a:pPr indent="0" marL="0">
+              <a:lnSpc>
+                <a:spcPct val="130000"/>
+              </a:lnSpc>
+              <a:spcAft>
+                <a:spcPts val="800"/>
+              </a:spcAft>
+              <a:buNone/>
+            </a:pPr>
+            <a:r>
+              <a:rPr lang="en-US" sz="1100" dirty="0">
+                <a:solidFill>
+                  <a:srgbClr val="1F2937"/>
+                </a:solidFill>
+                <a:latin typeface="Calibri" pitchFamily="34" charset="0"/>
+                <a:ea typeface="Calibri" pitchFamily="34" charset="-122"/>
+                <a:cs typeface="Calibri" pitchFamily="34" charset="-120"/>
+              </a:rPr>
+              <a:t>Preflight-check + reconciliation APIs</a:t>
+            </a:r>
+            <a:endParaRPr lang="en-US" sz="1100" dirty="0"/>
+          </a:p>
+        </p:txBody>
+      </p:sp>
+      <p:sp>
+        <p:nvSpPr>
+          <p:cNvPr id="10" name="Shape 8"/>
+          <p:cNvSpPr/>
+          <p:nvPr/>
+        </p:nvSpPr>
+        <p:spPr>
+          <a:xfrm>
+            <a:off x="4288536" y="2011680"/>
+            <a:ext cx="3611880" cy="4160520"/>
+          </a:xfrm>
+          <a:prstGeom prst="roundRect">
+            <a:avLst>
+              <a:gd name="adj" fmla="val 2532"/>
             </a:avLst>
           </a:prstGeom>
           <a:solidFill>
@@ -8686,99 +8751,237 @@
       </p:sp>
       <p:sp>
         <p:nvSpPr>
-          <p:cNvPr id="8" name="Text 6"/>
-          <p:cNvSpPr/>
-          <p:nvPr/>
-        </p:nvSpPr>
-        <p:spPr>
-          <a:xfrm>
-            <a:off x="4617720" y="2331720"/>
-            <a:ext cx="3063240" cy="457200"/>
-          </a:xfrm>
-          <a:prstGeom prst="rect">
-            <a:avLst/>
-          </a:prstGeom>
-          <a:noFill/>
-          <a:ln/>
-        </p:spPr>
-        <p:txBody>
-          <a:bodyPr wrap="square" rtlCol="0" anchor="ctr"/>
-          <a:lstStyle/>
-          <a:p>
-            <a:pPr indent="0" marL="0">
-              <a:buNone/>
-            </a:pPr>
-            <a:r>
-              <a:rPr lang="en-US" sz="1400" b="1" dirty="0">
-                <a:solidFill>
-                  <a:srgbClr val="0A2A43"/>
-                </a:solidFill>
-                <a:latin typeface="Calibri" pitchFamily="34" charset="0"/>
-                <a:ea typeface="Calibri" pitchFamily="34" charset="-122"/>
-                <a:cs typeface="Calibri" pitchFamily="34" charset="-120"/>
-              </a:rPr>
-              <a:t>Backend / Data</a:t>
-            </a:r>
-            <a:endParaRPr lang="en-US" sz="1400" dirty="0"/>
-          </a:p>
-        </p:txBody>
-      </p:sp>
-      <p:sp>
-        <p:nvSpPr>
-          <p:cNvPr id="9" name="Text 7"/>
-          <p:cNvSpPr/>
-          <p:nvPr/>
-        </p:nvSpPr>
-        <p:spPr>
-          <a:xfrm>
-            <a:off x="4617720" y="2834640"/>
-            <a:ext cx="3063240" cy="731520"/>
-          </a:xfrm>
-          <a:prstGeom prst="rect">
-            <a:avLst/>
-          </a:prstGeom>
-          <a:noFill/>
-          <a:ln/>
-        </p:spPr>
-        <p:txBody>
-          <a:bodyPr wrap="square" rtlCol="0" anchor="ctr"/>
-          <a:lstStyle/>
-          <a:p>
-            <a:pPr indent="0" marL="0">
-              <a:lnSpc>
-                <a:spcPct val="125000"/>
-              </a:lnSpc>
-              <a:buNone/>
-            </a:pPr>
-            <a:r>
-              <a:rPr lang="en-US" sz="1150" dirty="0">
-                <a:solidFill>
-                  <a:srgbClr val="1F2937"/>
-                </a:solidFill>
-                <a:latin typeface="Calibri" pitchFamily="34" charset="0"/>
-                <a:ea typeface="Calibri" pitchFamily="34" charset="-122"/>
-                <a:cs typeface="Calibri" pitchFamily="34" charset="-120"/>
-              </a:rPr>
-              <a:t>Prisma 7 + Neon Postgres, Auth.js v5</a:t>
-            </a:r>
-            <a:endParaRPr lang="en-US" sz="1150" dirty="0"/>
-          </a:p>
-        </p:txBody>
-      </p:sp>
-      <p:sp>
-        <p:nvSpPr>
-          <p:cNvPr id="10" name="Shape 8"/>
-          <p:cNvSpPr/>
-          <p:nvPr/>
-        </p:nvSpPr>
-        <p:spPr>
-          <a:xfrm>
-            <a:off x="8138160" y="2103120"/>
-            <a:ext cx="3611880" cy="1554480"/>
+          <p:cNvPr id="11" name="Shape 9"/>
+          <p:cNvSpPr/>
+          <p:nvPr/>
+        </p:nvSpPr>
+        <p:spPr>
+          <a:xfrm>
+            <a:off x="4288536" y="2011680"/>
+            <a:ext cx="3611880" cy="502920"/>
           </a:xfrm>
           <a:prstGeom prst="roundRect">
             <a:avLst>
-              <a:gd name="adj" fmla="val 5882"/>
+              <a:gd name="adj" fmla="val 18182"/>
+            </a:avLst>
+          </a:prstGeom>
+          <a:solidFill>
+            <a:srgbClr val="0A2A43"/>
+          </a:solidFill>
+          <a:ln/>
+        </p:spPr>
+      </p:sp>
+      <p:sp>
+        <p:nvSpPr>
+          <p:cNvPr id="12" name="Shape 10"/>
+          <p:cNvSpPr/>
+          <p:nvPr/>
+        </p:nvSpPr>
+        <p:spPr>
+          <a:xfrm>
+            <a:off x="4288536" y="2267712"/>
+            <a:ext cx="3611880" cy="246888"/>
+          </a:xfrm>
+          <a:prstGeom prst="rect">
+            <a:avLst/>
+          </a:prstGeom>
+          <a:solidFill>
+            <a:srgbClr val="0A2A43"/>
+          </a:solidFill>
+          <a:ln/>
+        </p:spPr>
+      </p:sp>
+      <p:sp>
+        <p:nvSpPr>
+          <p:cNvPr id="13" name="Text 11"/>
+          <p:cNvSpPr/>
+          <p:nvPr/>
+        </p:nvSpPr>
+        <p:spPr>
+          <a:xfrm>
+            <a:off x="4471416" y="2011680"/>
+            <a:ext cx="3246120" cy="502920"/>
+          </a:xfrm>
+          <a:prstGeom prst="rect">
+            <a:avLst/>
+          </a:prstGeom>
+          <a:noFill/>
+          <a:ln/>
+        </p:spPr>
+        <p:txBody>
+          <a:bodyPr wrap="square" rtlCol="0" anchor="ctr"/>
+          <a:lstStyle/>
+          <a:p>
+            <a:pPr indent="0" marL="0">
+              <a:buNone/>
+            </a:pPr>
+            <a:r>
+              <a:rPr lang="en-US" sz="1150" b="1" dirty="0">
+                <a:solidFill>
+                  <a:srgbClr val="FFFFFF"/>
+                </a:solidFill>
+                <a:latin typeface="Calibri" pitchFamily="34" charset="0"/>
+                <a:ea typeface="Calibri" pitchFamily="34" charset="-122"/>
+                <a:cs typeface="Calibri" pitchFamily="34" charset="-120"/>
+              </a:rPr>
+              <a:t>NEXT — DEEPENS GOVERNANCE</a:t>
+            </a:r>
+            <a:endParaRPr lang="en-US" sz="1150" dirty="0"/>
+          </a:p>
+        </p:txBody>
+      </p:sp>
+      <p:sp>
+        <p:nvSpPr>
+          <p:cNvPr id="14" name="Text 12"/>
+          <p:cNvSpPr/>
+          <p:nvPr/>
+        </p:nvSpPr>
+        <p:spPr>
+          <a:xfrm>
+            <a:off x="4489704" y="2697480"/>
+            <a:ext cx="3209544" cy="3246120"/>
+          </a:xfrm>
+          <a:prstGeom prst="rect">
+            <a:avLst/>
+          </a:prstGeom>
+          <a:noFill/>
+          <a:ln/>
+        </p:spPr>
+        <p:txBody>
+          <a:bodyPr wrap="square" rtlCol="0" anchor="ctr"/>
+          <a:lstStyle/>
+          <a:p>
+            <a:pPr marL="177800" indent="-177800">
+              <a:lnSpc>
+                <a:spcPct val="130000"/>
+              </a:lnSpc>
+              <a:spcAft>
+                <a:spcPts val="800"/>
+              </a:spcAft>
+              <a:buSzPct val="100000"/>
+              <a:buChar char="•"/>
+            </a:pPr>
+            <a:r>
+              <a:rPr lang="en-US" sz="1100" dirty="0">
+                <a:solidFill>
+                  <a:srgbClr val="1F2937"/>
+                </a:solidFill>
+                <a:latin typeface="Calibri" pitchFamily="34" charset="0"/>
+                <a:ea typeface="Calibri" pitchFamily="34" charset="-122"/>
+                <a:cs typeface="Calibri" pitchFamily="34" charset="-120"/>
+              </a:rPr>
+              <a:t>Governance templates per regulatory regime</a:t>
+            </a:r>
+            <a:endParaRPr lang="en-US" sz="1100" dirty="0"/>
+          </a:p>
+          <a:p>
+            <a:pPr indent="0" marL="0">
+              <a:lnSpc>
+                <a:spcPct val="130000"/>
+              </a:lnSpc>
+              <a:spcAft>
+                <a:spcPts val="800"/>
+              </a:spcAft>
+              <a:buNone/>
+            </a:pPr>
+            <a:r>
+              <a:rPr lang="en-US" sz="1100" dirty="0">
+                <a:solidFill>
+                  <a:srgbClr val="1F2937"/>
+                </a:solidFill>
+                <a:latin typeface="Calibri" pitchFamily="34" charset="0"/>
+                <a:ea typeface="Calibri" pitchFamily="34" charset="-122"/>
+                <a:cs typeface="Calibri" pitchFamily="34" charset="-120"/>
+              </a:rPr>
+              <a:t>Configurable PII patterns per org/region</a:t>
+            </a:r>
+            <a:endParaRPr lang="en-US" sz="1100" dirty="0"/>
+          </a:p>
+          <a:p>
+            <a:pPr indent="0" marL="0">
+              <a:lnSpc>
+                <a:spcPct val="130000"/>
+              </a:lnSpc>
+              <a:spcAft>
+                <a:spcPts val="800"/>
+              </a:spcAft>
+              <a:buNone/>
+            </a:pPr>
+            <a:r>
+              <a:rPr lang="en-US" sz="1100" dirty="0">
+                <a:solidFill>
+                  <a:srgbClr val="1F2937"/>
+                </a:solidFill>
+                <a:latin typeface="Calibri" pitchFamily="34" charset="0"/>
+                <a:ea typeface="Calibri" pitchFamily="34" charset="-122"/>
+                <a:cs typeface="Calibri" pitchFamily="34" charset="-120"/>
+              </a:rPr>
+              <a:t>Regulatory citation mapping</a:t>
+            </a:r>
+            <a:endParaRPr lang="en-US" sz="1100" dirty="0"/>
+          </a:p>
+          <a:p>
+            <a:pPr indent="0" marL="0">
+              <a:lnSpc>
+                <a:spcPct val="130000"/>
+              </a:lnSpc>
+              <a:spcAft>
+                <a:spcPts val="800"/>
+              </a:spcAft>
+              <a:buNone/>
+            </a:pPr>
+            <a:r>
+              <a:rPr lang="en-US" sz="1100" dirty="0">
+                <a:solidFill>
+                  <a:srgbClr val="1F2937"/>
+                </a:solidFill>
+                <a:latin typeface="Calibri" pitchFamily="34" charset="0"/>
+                <a:ea typeface="Calibri" pitchFamily="34" charset="-122"/>
+                <a:cs typeface="Calibri" pitchFamily="34" charset="-120"/>
+              </a:rPr>
+              <a:t>Incident workflow tied to the kill-switch</a:t>
+            </a:r>
+            <a:endParaRPr lang="en-US" sz="1100" dirty="0"/>
+          </a:p>
+          <a:p>
+            <a:pPr indent="0" marL="0">
+              <a:lnSpc>
+                <a:spcPct val="130000"/>
+              </a:lnSpc>
+              <a:spcAft>
+                <a:spcPts val="800"/>
+              </a:spcAft>
+              <a:buNone/>
+            </a:pPr>
+            <a:r>
+              <a:rPr lang="en-US" sz="1100" dirty="0">
+                <a:solidFill>
+                  <a:srgbClr val="1F2937"/>
+                </a:solidFill>
+                <a:latin typeface="Calibri" pitchFamily="34" charset="0"/>
+                <a:ea typeface="Calibri" pitchFamily="34" charset="-122"/>
+                <a:cs typeface="Calibri" pitchFamily="34" charset="-120"/>
+              </a:rPr>
+              <a:t>Aggregate portfolio risk rollup</a:t>
+            </a:r>
+            <a:endParaRPr lang="en-US" sz="1100" dirty="0"/>
+          </a:p>
+        </p:txBody>
+      </p:sp>
+      <p:sp>
+        <p:nvSpPr>
+          <p:cNvPr id="15" name="Shape 13"/>
+          <p:cNvSpPr/>
+          <p:nvPr/>
+        </p:nvSpPr>
+        <p:spPr>
+          <a:xfrm>
+            <a:off x="8119872" y="2011680"/>
+            <a:ext cx="3611880" cy="4160520"/>
+          </a:xfrm>
+          <a:prstGeom prst="roundRect">
+            <a:avLst>
+              <a:gd name="adj" fmla="val 2532"/>
             </a:avLst>
           </a:prstGeom>
           <a:solidFill>
@@ -8789,175 +8992,118 @@
       </p:sp>
       <p:sp>
         <p:nvSpPr>
-          <p:cNvPr id="11" name="Text 9"/>
-          <p:cNvSpPr/>
-          <p:nvPr/>
-        </p:nvSpPr>
-        <p:spPr>
-          <a:xfrm>
-            <a:off x="8412480" y="2331720"/>
-            <a:ext cx="3063240" cy="457200"/>
-          </a:xfrm>
-          <a:prstGeom prst="rect">
-            <a:avLst/>
-          </a:prstGeom>
-          <a:noFill/>
-          <a:ln/>
-        </p:spPr>
-        <p:txBody>
-          <a:bodyPr wrap="square" rtlCol="0" anchor="ctr"/>
-          <a:lstStyle/>
-          <a:p>
-            <a:pPr indent="0" marL="0">
-              <a:buNone/>
-            </a:pPr>
-            <a:r>
-              <a:rPr lang="en-US" sz="1400" b="1" dirty="0">
-                <a:solidFill>
-                  <a:srgbClr val="0A2A43"/>
-                </a:solidFill>
-                <a:latin typeface="Calibri" pitchFamily="34" charset="0"/>
-                <a:ea typeface="Calibri" pitchFamily="34" charset="-122"/>
-                <a:cs typeface="Calibri" pitchFamily="34" charset="-120"/>
-              </a:rPr>
-              <a:t>Agent Orchestration</a:t>
-            </a:r>
-            <a:endParaRPr lang="en-US" sz="1400" dirty="0"/>
-          </a:p>
-        </p:txBody>
-      </p:sp>
-      <p:sp>
-        <p:nvSpPr>
-          <p:cNvPr id="12" name="Text 10"/>
-          <p:cNvSpPr/>
-          <p:nvPr/>
-        </p:nvSpPr>
-        <p:spPr>
-          <a:xfrm>
-            <a:off x="8412480" y="2834640"/>
-            <a:ext cx="3063240" cy="731520"/>
-          </a:xfrm>
-          <a:prstGeom prst="rect">
-            <a:avLst/>
-          </a:prstGeom>
-          <a:noFill/>
-          <a:ln/>
-        </p:spPr>
-        <p:txBody>
-          <a:bodyPr wrap="square" rtlCol="0" anchor="ctr"/>
-          <a:lstStyle/>
-          <a:p>
-            <a:pPr indent="0" marL="0">
-              <a:lnSpc>
-                <a:spcPct val="125000"/>
-              </a:lnSpc>
-              <a:buNone/>
-            </a:pPr>
-            <a:r>
-              <a:rPr lang="en-US" sz="1150" dirty="0">
-                <a:solidFill>
-                  <a:srgbClr val="1F2937"/>
-                </a:solidFill>
-                <a:latin typeface="Calibri" pitchFamily="34" charset="0"/>
-                <a:ea typeface="Calibri" pitchFamily="34" charset="-122"/>
-                <a:cs typeface="Calibri" pitchFamily="34" charset="-120"/>
-              </a:rPr>
-              <a:t>LangGraph + LangChain, SSE streaming</a:t>
-            </a:r>
-            <a:endParaRPr lang="en-US" sz="1150" dirty="0"/>
-          </a:p>
-        </p:txBody>
-      </p:sp>
-      <p:sp>
-        <p:nvSpPr>
-          <p:cNvPr id="13" name="Shape 11"/>
-          <p:cNvSpPr/>
-          <p:nvPr/>
-        </p:nvSpPr>
-        <p:spPr>
-          <a:xfrm>
-            <a:off x="548640" y="3840480"/>
-            <a:ext cx="3611880" cy="1554480"/>
+          <p:cNvPr id="16" name="Shape 14"/>
+          <p:cNvSpPr/>
+          <p:nvPr/>
+        </p:nvSpPr>
+        <p:spPr>
+          <a:xfrm>
+            <a:off x="8119872" y="2011680"/>
+            <a:ext cx="3611880" cy="502920"/>
           </a:xfrm>
           <a:prstGeom prst="roundRect">
             <a:avLst>
-              <a:gd name="adj" fmla="val 5882"/>
+              <a:gd name="adj" fmla="val 18182"/>
             </a:avLst>
           </a:prstGeom>
           <a:solidFill>
-            <a:srgbClr val="F3F6F8"/>
+            <a:srgbClr val="6B7280"/>
           </a:solidFill>
           <a:ln/>
         </p:spPr>
       </p:sp>
       <p:sp>
         <p:nvSpPr>
-          <p:cNvPr id="14" name="Text 12"/>
-          <p:cNvSpPr/>
-          <p:nvPr/>
-        </p:nvSpPr>
-        <p:spPr>
-          <a:xfrm>
-            <a:off x="822960" y="4069080"/>
-            <a:ext cx="3063240" cy="457200"/>
-          </a:xfrm>
-          <a:prstGeom prst="rect">
-            <a:avLst/>
-          </a:prstGeom>
-          <a:noFill/>
-          <a:ln/>
-        </p:spPr>
-        <p:txBody>
-          <a:bodyPr wrap="square" rtlCol="0" anchor="ctr"/>
-          <a:lstStyle/>
-          <a:p>
-            <a:pPr indent="0" marL="0">
-              <a:buNone/>
-            </a:pPr>
-            <a:r>
-              <a:rPr lang="en-US" sz="1400" b="1" dirty="0">
-                <a:solidFill>
-                  <a:srgbClr val="0A2A43"/>
-                </a:solidFill>
-                <a:latin typeface="Calibri" pitchFamily="34" charset="0"/>
-                <a:ea typeface="Calibri" pitchFamily="34" charset="-122"/>
-                <a:cs typeface="Calibri" pitchFamily="34" charset="-120"/>
-              </a:rPr>
-              <a:t>Retrieval / RAG</a:t>
-            </a:r>
-            <a:endParaRPr lang="en-US" sz="1400" dirty="0"/>
-          </a:p>
-        </p:txBody>
-      </p:sp>
-      <p:sp>
-        <p:nvSpPr>
-          <p:cNvPr id="15" name="Text 13"/>
-          <p:cNvSpPr/>
-          <p:nvPr/>
-        </p:nvSpPr>
-        <p:spPr>
-          <a:xfrm>
-            <a:off x="822960" y="4572000"/>
-            <a:ext cx="3063240" cy="731520"/>
-          </a:xfrm>
-          <a:prstGeom prst="rect">
-            <a:avLst/>
-          </a:prstGeom>
-          <a:noFill/>
-          <a:ln/>
-        </p:spPr>
-        <p:txBody>
-          <a:bodyPr wrap="square" rtlCol="0" anchor="ctr"/>
-          <a:lstStyle/>
-          <a:p>
-            <a:pPr indent="0" marL="0">
+          <p:cNvPr id="17" name="Shape 15"/>
+          <p:cNvSpPr/>
+          <p:nvPr/>
+        </p:nvSpPr>
+        <p:spPr>
+          <a:xfrm>
+            <a:off x="8119872" y="2267712"/>
+            <a:ext cx="3611880" cy="246888"/>
+          </a:xfrm>
+          <a:prstGeom prst="rect">
+            <a:avLst/>
+          </a:prstGeom>
+          <a:solidFill>
+            <a:srgbClr val="6B7280"/>
+          </a:solidFill>
+          <a:ln/>
+        </p:spPr>
+      </p:sp>
+      <p:sp>
+        <p:nvSpPr>
+          <p:cNvPr id="18" name="Text 16"/>
+          <p:cNvSpPr/>
+          <p:nvPr/>
+        </p:nvSpPr>
+        <p:spPr>
+          <a:xfrm>
+            <a:off x="8302752" y="2011680"/>
+            <a:ext cx="3246120" cy="502920"/>
+          </a:xfrm>
+          <a:prstGeom prst="rect">
+            <a:avLst/>
+          </a:prstGeom>
+          <a:noFill/>
+          <a:ln/>
+        </p:spPr>
+        <p:txBody>
+          <a:bodyPr wrap="square" rtlCol="0" anchor="ctr"/>
+          <a:lstStyle/>
+          <a:p>
+            <a:pPr indent="0" marL="0">
+              <a:buNone/>
+            </a:pPr>
+            <a:r>
+              <a:rPr lang="en-US" sz="1150" b="1" dirty="0">
+                <a:solidFill>
+                  <a:srgbClr val="FFFFFF"/>
+                </a:solidFill>
+                <a:latin typeface="Calibri" pitchFamily="34" charset="0"/>
+                <a:ea typeface="Calibri" pitchFamily="34" charset="-122"/>
+                <a:cs typeface="Calibri" pitchFamily="34" charset="-120"/>
+              </a:rPr>
+              <a:t>LATER &amp; HARDENING</a:t>
+            </a:r>
+            <a:endParaRPr lang="en-US" sz="1150" dirty="0"/>
+          </a:p>
+        </p:txBody>
+      </p:sp>
+      <p:sp>
+        <p:nvSpPr>
+          <p:cNvPr id="19" name="Text 17"/>
+          <p:cNvSpPr/>
+          <p:nvPr/>
+        </p:nvSpPr>
+        <p:spPr>
+          <a:xfrm>
+            <a:off x="8321040" y="2697480"/>
+            <a:ext cx="3209544" cy="3246120"/>
+          </a:xfrm>
+          <a:prstGeom prst="rect">
+            <a:avLst/>
+          </a:prstGeom>
+          <a:noFill/>
+          <a:ln/>
+        </p:spPr>
+        <p:txBody>
+          <a:bodyPr wrap="square" rtlCol="0" anchor="ctr"/>
+          <a:lstStyle/>
+          <a:p>
+            <a:pPr marL="177800" indent="-177800">
               <a:lnSpc>
-                <a:spcPct val="125000"/>
+                <a:spcPct val="130000"/>
               </a:lnSpc>
-              <a:buNone/>
-            </a:pPr>
-            <a:r>
-              <a:rPr lang="en-US" sz="1150" dirty="0">
+              <a:spcAft>
+                <a:spcPts val="800"/>
+              </a:spcAft>
+              <a:buSzPct val="100000"/>
+              <a:buChar char="•"/>
+            </a:pPr>
+            <a:r>
+              <a:rPr lang="en-US" sz="1100" dirty="0">
                 <a:solidFill>
                   <a:srgbClr val="1F2937"/>
                 </a:solidFill>
@@ -8965,102 +9111,22 @@
                 <a:ea typeface="Calibri" pitchFamily="34" charset="-122"/>
                 <a:cs typeface="Calibri" pitchFamily="34" charset="-120"/>
               </a:rPr>
-              <a:t>Pinecone + Cohere</a:t>
-            </a:r>
-            <a:endParaRPr lang="en-US" sz="1150" dirty="0"/>
-          </a:p>
-        </p:txBody>
-      </p:sp>
-      <p:sp>
-        <p:nvSpPr>
-          <p:cNvPr id="16" name="Shape 14"/>
-          <p:cNvSpPr/>
-          <p:nvPr/>
-        </p:nvSpPr>
-        <p:spPr>
-          <a:xfrm>
-            <a:off x="4343400" y="3840480"/>
-            <a:ext cx="3611880" cy="1554480"/>
-          </a:xfrm>
-          <a:prstGeom prst="roundRect">
-            <a:avLst>
-              <a:gd name="adj" fmla="val 5882"/>
-            </a:avLst>
-          </a:prstGeom>
-          <a:solidFill>
-            <a:srgbClr val="F3F6F8"/>
-          </a:solidFill>
-          <a:ln/>
-        </p:spPr>
-      </p:sp>
-      <p:sp>
-        <p:nvSpPr>
-          <p:cNvPr id="17" name="Text 15"/>
-          <p:cNvSpPr/>
-          <p:nvPr/>
-        </p:nvSpPr>
-        <p:spPr>
-          <a:xfrm>
-            <a:off x="4617720" y="4069080"/>
-            <a:ext cx="3063240" cy="457200"/>
-          </a:xfrm>
-          <a:prstGeom prst="rect">
-            <a:avLst/>
-          </a:prstGeom>
-          <a:noFill/>
-          <a:ln/>
-        </p:spPr>
-        <p:txBody>
-          <a:bodyPr wrap="square" rtlCol="0" anchor="ctr"/>
-          <a:lstStyle/>
-          <a:p>
-            <a:pPr indent="0" marL="0">
-              <a:buNone/>
-            </a:pPr>
-            <a:r>
-              <a:rPr lang="en-US" sz="1400" b="1" dirty="0">
-                <a:solidFill>
-                  <a:srgbClr val="0A2A43"/>
-                </a:solidFill>
-                <a:latin typeface="Calibri" pitchFamily="34" charset="0"/>
-                <a:ea typeface="Calibri" pitchFamily="34" charset="-122"/>
-                <a:cs typeface="Calibri" pitchFamily="34" charset="-120"/>
-              </a:rPr>
-              <a:t>AI Gateway</a:t>
-            </a:r>
-            <a:endParaRPr lang="en-US" sz="1400" dirty="0"/>
-          </a:p>
-        </p:txBody>
-      </p:sp>
-      <p:sp>
-        <p:nvSpPr>
-          <p:cNvPr id="18" name="Text 16"/>
-          <p:cNvSpPr/>
-          <p:nvPr/>
-        </p:nvSpPr>
-        <p:spPr>
-          <a:xfrm>
-            <a:off x="4617720" y="4572000"/>
-            <a:ext cx="3063240" cy="731520"/>
-          </a:xfrm>
-          <a:prstGeom prst="rect">
-            <a:avLst/>
-          </a:prstGeom>
-          <a:noFill/>
-          <a:ln/>
-        </p:spPr>
-        <p:txBody>
-          <a:bodyPr wrap="square" rtlCol="0" anchor="ctr"/>
-          <a:lstStyle/>
+              <a:t>Intake &amp; reference architecture templates</a:t>
+            </a:r>
+            <a:endParaRPr lang="en-US" sz="1100" dirty="0"/>
+          </a:p>
           <a:p>
             <a:pPr indent="0" marL="0">
               <a:lnSpc>
-                <a:spcPct val="125000"/>
+                <a:spcPct val="130000"/>
               </a:lnSpc>
-              <a:buNone/>
-            </a:pPr>
-            <a:r>
-              <a:rPr lang="en-US" sz="1150" dirty="0">
+              <a:spcAft>
+                <a:spcPts val="800"/>
+              </a:spcAft>
+              <a:buNone/>
+            </a:pPr>
+            <a:r>
+              <a:rPr lang="en-US" sz="1100" dirty="0">
                 <a:solidFill>
                   <a:srgbClr val="1F2937"/>
                 </a:solidFill>
@@ -9068,118 +9134,61 @@
                 <a:ea typeface="Calibri" pitchFamily="34" charset="-122"/>
                 <a:cs typeface="Calibri" pitchFamily="34" charset="-120"/>
               </a:rPr>
-              <a:t>Self-hosted LiteLLM Proxy, Google Cloud Run</a:t>
-            </a:r>
-            <a:endParaRPr lang="en-US" sz="1150" dirty="0"/>
-          </a:p>
-        </p:txBody>
-      </p:sp>
-      <p:sp>
-        <p:nvSpPr>
-          <p:cNvPr id="19" name="Shape 17"/>
-          <p:cNvSpPr/>
-          <p:nvPr/>
-        </p:nvSpPr>
-        <p:spPr>
-          <a:xfrm>
-            <a:off x="8138160" y="3840480"/>
-            <a:ext cx="3611880" cy="1554480"/>
-          </a:xfrm>
-          <a:prstGeom prst="roundRect">
-            <a:avLst>
-              <a:gd name="adj" fmla="val 5882"/>
-            </a:avLst>
-          </a:prstGeom>
-          <a:solidFill>
-            <a:srgbClr val="F3F6F8"/>
-          </a:solidFill>
-          <a:ln/>
-        </p:spPr>
+              <a:t>Vendor/model blast-radius reverse lookup</a:t>
+            </a:r>
+            <a:endParaRPr lang="en-US" sz="1100" dirty="0"/>
+          </a:p>
+          <a:p>
+            <a:pPr indent="0" marL="0">
+              <a:lnSpc>
+                <a:spcPct val="130000"/>
+              </a:lnSpc>
+              <a:spcAft>
+                <a:spcPts val="800"/>
+              </a:spcAft>
+              <a:buNone/>
+            </a:pPr>
+            <a:r>
+              <a:rPr lang="en-US" sz="1100" dirty="0">
+                <a:solidFill>
+                  <a:srgbClr val="1F2937"/>
+                </a:solidFill>
+                <a:latin typeface="Calibri" pitchFamily="34" charset="0"/>
+                <a:ea typeface="Calibri" pitchFamily="34" charset="-122"/>
+                <a:cs typeface="Calibri" pitchFamily="34" charset="-120"/>
+              </a:rPr>
+              <a:t>Configurable approval workflows per org</a:t>
+            </a:r>
+            <a:endParaRPr lang="en-US" sz="1100" dirty="0"/>
+          </a:p>
+          <a:p>
+            <a:pPr indent="0" marL="0">
+              <a:lnSpc>
+                <a:spcPct val="130000"/>
+              </a:lnSpc>
+              <a:spcAft>
+                <a:spcPts val="800"/>
+              </a:spcAft>
+              <a:buNone/>
+            </a:pPr>
+            <a:r>
+              <a:rPr lang="en-US" sz="1100" dirty="0">
+                <a:solidFill>
+                  <a:srgbClr val="1F2937"/>
+                </a:solidFill>
+                <a:latin typeface="Calibri" pitchFamily="34" charset="0"/>
+                <a:ea typeface="Calibri" pitchFamily="34" charset="-122"/>
+                <a:cs typeface="Calibri" pitchFamily="34" charset="-120"/>
+              </a:rPr>
+              <a:t>Broader test coverage, accessibility audit, SCIM, per-tenant branding</a:t>
+            </a:r>
+            <a:endParaRPr lang="en-US" sz="1100" dirty="0"/>
+          </a:p>
+        </p:txBody>
       </p:sp>
       <p:sp>
         <p:nvSpPr>
           <p:cNvPr id="20" name="Text 18"/>
-          <p:cNvSpPr/>
-          <p:nvPr/>
-        </p:nvSpPr>
-        <p:spPr>
-          <a:xfrm>
-            <a:off x="8412480" y="4069080"/>
-            <a:ext cx="3063240" cy="457200"/>
-          </a:xfrm>
-          <a:prstGeom prst="rect">
-            <a:avLst/>
-          </a:prstGeom>
-          <a:noFill/>
-          <a:ln/>
-        </p:spPr>
-        <p:txBody>
-          <a:bodyPr wrap="square" rtlCol="0" anchor="ctr"/>
-          <a:lstStyle/>
-          <a:p>
-            <a:pPr indent="0" marL="0">
-              <a:buNone/>
-            </a:pPr>
-            <a:r>
-              <a:rPr lang="en-US" sz="1400" b="1" dirty="0">
-                <a:solidFill>
-                  <a:srgbClr val="0A2A43"/>
-                </a:solidFill>
-                <a:latin typeface="Calibri" pitchFamily="34" charset="0"/>
-                <a:ea typeface="Calibri" pitchFamily="34" charset="-122"/>
-                <a:cs typeface="Calibri" pitchFamily="34" charset="-120"/>
-              </a:rPr>
-              <a:t>Real-time / Caching</a:t>
-            </a:r>
-            <a:endParaRPr lang="en-US" sz="1400" dirty="0"/>
-          </a:p>
-        </p:txBody>
-      </p:sp>
-      <p:sp>
-        <p:nvSpPr>
-          <p:cNvPr id="21" name="Text 19"/>
-          <p:cNvSpPr/>
-          <p:nvPr/>
-        </p:nvSpPr>
-        <p:spPr>
-          <a:xfrm>
-            <a:off x="8412480" y="4572000"/>
-            <a:ext cx="3063240" cy="731520"/>
-          </a:xfrm>
-          <a:prstGeom prst="rect">
-            <a:avLst/>
-          </a:prstGeom>
-          <a:noFill/>
-          <a:ln/>
-        </p:spPr>
-        <p:txBody>
-          <a:bodyPr wrap="square" rtlCol="0" anchor="ctr"/>
-          <a:lstStyle/>
-          <a:p>
-            <a:pPr indent="0" marL="0">
-              <a:lnSpc>
-                <a:spcPct val="125000"/>
-              </a:lnSpc>
-              <a:buNone/>
-            </a:pPr>
-            <a:r>
-              <a:rPr lang="en-US" sz="1150" dirty="0">
-                <a:solidFill>
-                  <a:srgbClr val="1F2937"/>
-                </a:solidFill>
-                <a:latin typeface="Calibri" pitchFamily="34" charset="0"/>
-                <a:ea typeface="Calibri" pitchFamily="34" charset="-122"/>
-                <a:cs typeface="Calibri" pitchFamily="34" charset="-120"/>
-              </a:rPr>
-              <a:t>Redis (Upstash)</a:t>
-            </a:r>
-            <a:endParaRPr lang="en-US" sz="1150" dirty="0"/>
-          </a:p>
-        </p:txBody>
-      </p:sp>
-      <p:sp>
-        <p:nvSpPr>
-          <p:cNvPr id="22" name="Text 20"/>
           <p:cNvSpPr/>
           <p:nvPr/>
         </p:nvSpPr>
@@ -9218,7 +9227,7 @@
       </p:sp>
       <p:sp>
         <p:nvSpPr>
-          <p:cNvPr id="23" name="Text 21"/>
+          <p:cNvPr id="21" name="Text 19"/>
           <p:cNvSpPr/>
           <p:nvPr/>
         </p:nvSpPr>
@@ -9266,910 +9275,6 @@
 <file path=ppt/slides/slide17.xml><?xml version="1.0" encoding="utf-8"?>
 <p:sld xmlns:a="http://schemas.openxmlformats.org/drawingml/2006/main" xmlns:r="http://schemas.openxmlformats.org/officeDocument/2006/relationships" xmlns:p="http://schemas.openxmlformats.org/presentationml/2006/main">
   <p:cSld name="Slide 17">
-    <p:bg>
-      <p:bgPr>
-        <a:solidFill>
-          <a:srgbClr val="FFFFFF"/>
-        </a:solidFill>
-      </p:bgPr>
-    </p:bg>
-    <p:spTree>
-      <p:nvGrpSpPr>
-        <p:cNvPr id="1" name=""/>
-        <p:cNvGrpSpPr/>
-        <p:nvPr/>
-      </p:nvGrpSpPr>
-      <p:grpSpPr>
-        <a:xfrm>
-          <a:off x="0" y="0"/>
-          <a:ext cx="0" cy="0"/>
-          <a:chOff x="0" y="0"/>
-          <a:chExt cx="0" cy="0"/>
-        </a:xfrm>
-      </p:grpSpPr>
-      <p:sp>
-        <p:nvSpPr>
-          <p:cNvPr id="2" name="Text 0"/>
-          <p:cNvSpPr/>
-          <p:nvPr/>
-        </p:nvSpPr>
-        <p:spPr>
-          <a:xfrm>
-            <a:off x="548640" y="457200"/>
-            <a:ext cx="7315200" cy="365760"/>
-          </a:xfrm>
-          <a:prstGeom prst="rect">
-            <a:avLst/>
-          </a:prstGeom>
-          <a:noFill/>
-          <a:ln/>
-        </p:spPr>
-        <p:txBody>
-          <a:bodyPr wrap="square" rtlCol="0" anchor="ctr"/>
-          <a:lstStyle/>
-          <a:p>
-            <a:pPr indent="0" marL="0">
-              <a:buNone/>
-            </a:pPr>
-            <a:r>
-              <a:rPr lang="en-US" sz="1200" b="1" spc="200" kern="0" dirty="0">
-                <a:solidFill>
-                  <a:srgbClr val="1A9C94"/>
-                </a:solidFill>
-                <a:latin typeface="Calibri" pitchFamily="34" charset="0"/>
-                <a:ea typeface="Calibri" pitchFamily="34" charset="-122"/>
-                <a:cs typeface="Calibri" pitchFamily="34" charset="-120"/>
-              </a:rPr>
-              <a:t>PHASED IMPLEMENTATION</a:t>
-            </a:r>
-            <a:endParaRPr lang="en-US" sz="1200" dirty="0"/>
-          </a:p>
-        </p:txBody>
-      </p:sp>
-      <p:sp>
-        <p:nvSpPr>
-          <p:cNvPr id="3" name="Text 1"/>
-          <p:cNvSpPr/>
-          <p:nvPr/>
-        </p:nvSpPr>
-        <p:spPr>
-          <a:xfrm>
-            <a:off x="548640" y="822960"/>
-            <a:ext cx="10972800" cy="548640"/>
-          </a:xfrm>
-          <a:prstGeom prst="rect">
-            <a:avLst/>
-          </a:prstGeom>
-          <a:noFill/>
-          <a:ln/>
-        </p:spPr>
-        <p:txBody>
-          <a:bodyPr wrap="square" rtlCol="0" anchor="ctr"/>
-          <a:lstStyle/>
-          <a:p>
-            <a:pPr indent="0" marL="0">
-              <a:buNone/>
-            </a:pPr>
-            <a:r>
-              <a:rPr lang="en-US" sz="2400" b="1" dirty="0">
-                <a:solidFill>
-                  <a:srgbClr val="0A2A43"/>
-                </a:solidFill>
-                <a:latin typeface="Cambria" pitchFamily="34" charset="0"/>
-                <a:ea typeface="Cambria" pitchFamily="34" charset="-122"/>
-                <a:cs typeface="Cambria" pitchFamily="34" charset="-120"/>
-              </a:rPr>
-              <a:t>No invented dates — sequenced by what deepens governance first</a:t>
-            </a:r>
-            <a:endParaRPr lang="en-US" sz="2400" dirty="0"/>
-          </a:p>
-        </p:txBody>
-      </p:sp>
-      <p:sp>
-        <p:nvSpPr>
-          <p:cNvPr id="4" name="Text 2"/>
-          <p:cNvSpPr/>
-          <p:nvPr/>
-        </p:nvSpPr>
-        <p:spPr>
-          <a:xfrm>
-            <a:off x="548640" y="1371600"/>
-            <a:ext cx="10972800" cy="365760"/>
-          </a:xfrm>
-          <a:prstGeom prst="rect">
-            <a:avLst/>
-          </a:prstGeom>
-          <a:noFill/>
-          <a:ln/>
-        </p:spPr>
-        <p:txBody>
-          <a:bodyPr wrap="square" rtlCol="0" anchor="ctr"/>
-          <a:lstStyle/>
-          <a:p>
-            <a:pPr indent="0" marL="0">
-              <a:buNone/>
-            </a:pPr>
-            <a:r>
-              <a:rPr lang="en-US" sz="1250" i="1" dirty="0">
-                <a:solidFill>
-                  <a:srgbClr val="6B7280"/>
-                </a:solidFill>
-                <a:latin typeface="Calibri" pitchFamily="34" charset="0"/>
-                <a:ea typeface="Calibri" pitchFamily="34" charset="-122"/>
-                <a:cs typeface="Calibri" pitchFamily="34" charset="-120"/>
-              </a:rPr>
-              <a:t>A single-team roadmap can't credibly commit to a quarter, so this is grouped by sequencing, not promised timing.</a:t>
-            </a:r>
-            <a:endParaRPr lang="en-US" sz="1250" dirty="0"/>
-          </a:p>
-        </p:txBody>
-      </p:sp>
-      <p:sp>
-        <p:nvSpPr>
-          <p:cNvPr id="5" name="Shape 3"/>
-          <p:cNvSpPr/>
-          <p:nvPr/>
-        </p:nvSpPr>
-        <p:spPr>
-          <a:xfrm>
-            <a:off x="457200" y="2011680"/>
-            <a:ext cx="3611880" cy="4160520"/>
-          </a:xfrm>
-          <a:prstGeom prst="roundRect">
-            <a:avLst>
-              <a:gd name="adj" fmla="val 2532"/>
-            </a:avLst>
-          </a:prstGeom>
-          <a:solidFill>
-            <a:srgbClr val="F3F6F8"/>
-          </a:solidFill>
-          <a:ln/>
-        </p:spPr>
-      </p:sp>
-      <p:sp>
-        <p:nvSpPr>
-          <p:cNvPr id="6" name="Shape 4"/>
-          <p:cNvSpPr/>
-          <p:nvPr/>
-        </p:nvSpPr>
-        <p:spPr>
-          <a:xfrm>
-            <a:off x="457200" y="2011680"/>
-            <a:ext cx="3611880" cy="502920"/>
-          </a:xfrm>
-          <a:prstGeom prst="roundRect">
-            <a:avLst>
-              <a:gd name="adj" fmla="val 18182"/>
-            </a:avLst>
-          </a:prstGeom>
-          <a:solidFill>
-            <a:srgbClr val="1A9C94"/>
-          </a:solidFill>
-          <a:ln/>
-        </p:spPr>
-      </p:sp>
-      <p:sp>
-        <p:nvSpPr>
-          <p:cNvPr id="7" name="Shape 5"/>
-          <p:cNvSpPr/>
-          <p:nvPr/>
-        </p:nvSpPr>
-        <p:spPr>
-          <a:xfrm>
-            <a:off x="457200" y="2267712"/>
-            <a:ext cx="3611880" cy="246888"/>
-          </a:xfrm>
-          <a:prstGeom prst="rect">
-            <a:avLst/>
-          </a:prstGeom>
-          <a:solidFill>
-            <a:srgbClr val="1A9C94"/>
-          </a:solidFill>
-          <a:ln/>
-        </p:spPr>
-      </p:sp>
-      <p:sp>
-        <p:nvSpPr>
-          <p:cNvPr id="8" name="Text 6"/>
-          <p:cNvSpPr/>
-          <p:nvPr/>
-        </p:nvSpPr>
-        <p:spPr>
-          <a:xfrm>
-            <a:off x="640080" y="2011680"/>
-            <a:ext cx="3246120" cy="502920"/>
-          </a:xfrm>
-          <a:prstGeom prst="rect">
-            <a:avLst/>
-          </a:prstGeom>
-          <a:noFill/>
-          <a:ln/>
-        </p:spPr>
-        <p:txBody>
-          <a:bodyPr wrap="square" rtlCol="0" anchor="ctr"/>
-          <a:lstStyle/>
-          <a:p>
-            <a:pPr indent="0" marL="0">
-              <a:buNone/>
-            </a:pPr>
-            <a:r>
-              <a:rPr lang="en-US" sz="1150" b="1" dirty="0">
-                <a:solidFill>
-                  <a:srgbClr val="FFFFFF"/>
-                </a:solidFill>
-                <a:latin typeface="Calibri" pitchFamily="34" charset="0"/>
-                <a:ea typeface="Calibri" pitchFamily="34" charset="-122"/>
-                <a:cs typeface="Calibri" pitchFamily="34" charset="-120"/>
-              </a:rPr>
-              <a:t>DELIVERED — MVP, LIVE TODAY</a:t>
-            </a:r>
-            <a:endParaRPr lang="en-US" sz="1150" dirty="0"/>
-          </a:p>
-        </p:txBody>
-      </p:sp>
-      <p:sp>
-        <p:nvSpPr>
-          <p:cNvPr id="9" name="Text 7"/>
-          <p:cNvSpPr/>
-          <p:nvPr/>
-        </p:nvSpPr>
-        <p:spPr>
-          <a:xfrm>
-            <a:off x="658368" y="2697480"/>
-            <a:ext cx="3209544" cy="3246120"/>
-          </a:xfrm>
-          <a:prstGeom prst="rect">
-            <a:avLst/>
-          </a:prstGeom>
-          <a:noFill/>
-          <a:ln/>
-        </p:spPr>
-        <p:txBody>
-          <a:bodyPr wrap="square" rtlCol="0" anchor="ctr"/>
-          <a:lstStyle/>
-          <a:p>
-            <a:pPr marL="177800" indent="-177800">
-              <a:lnSpc>
-                <a:spcPct val="130000"/>
-              </a:lnSpc>
-              <a:spcAft>
-                <a:spcPts val="800"/>
-              </a:spcAft>
-              <a:buSzPct val="100000"/>
-              <a:buChar char="•"/>
-            </a:pPr>
-            <a:r>
-              <a:rPr lang="en-US" sz="1100" dirty="0">
-                <a:solidFill>
-                  <a:srgbClr val="1F2937"/>
-                </a:solidFill>
-                <a:latin typeface="Calibri" pitchFamily="34" charset="0"/>
-                <a:ea typeface="Calibri" pitchFamily="34" charset="-122"/>
-                <a:cs typeface="Calibri" pitchFamily="34" charset="-120"/>
-              </a:rPr>
-              <a:t>Full pipeline, Discovery through Observability</a:t>
-            </a:r>
-            <a:endParaRPr lang="en-US" sz="1100" dirty="0"/>
-          </a:p>
-          <a:p>
-            <a:pPr indent="0" marL="0">
-              <a:lnSpc>
-                <a:spcPct val="130000"/>
-              </a:lnSpc>
-              <a:spcAft>
-                <a:spcPts val="800"/>
-              </a:spcAft>
-              <a:buNone/>
-            </a:pPr>
-            <a:r>
-              <a:rPr lang="en-US" sz="1100" dirty="0">
-                <a:solidFill>
-                  <a:srgbClr val="1F2937"/>
-                </a:solidFill>
-                <a:latin typeface="Calibri" pitchFamily="34" charset="0"/>
-                <a:ea typeface="Calibri" pitchFamily="34" charset="-122"/>
-                <a:cs typeface="Calibri" pitchFamily="34" charset="-120"/>
-              </a:rPr>
-              <a:t>Real runtime governance: kill-switch, audit log, PII redaction</a:t>
-            </a:r>
-            <a:endParaRPr lang="en-US" sz="1100" dirty="0"/>
-          </a:p>
-          <a:p>
-            <a:pPr indent="0" marL="0">
-              <a:lnSpc>
-                <a:spcPct val="130000"/>
-              </a:lnSpc>
-              <a:spcAft>
-                <a:spcPts val="800"/>
-              </a:spcAft>
-              <a:buNone/>
-            </a:pPr>
-            <a:r>
-              <a:rPr lang="en-US" sz="1100" dirty="0">
-                <a:solidFill>
-                  <a:srgbClr val="1F2937"/>
-                </a:solidFill>
-                <a:latin typeface="Calibri" pitchFamily="34" charset="0"/>
-                <a:ea typeface="Calibri" pitchFamily="34" charset="-122"/>
-                <a:cs typeface="Calibri" pitchFamily="34" charset="-120"/>
-              </a:rPr>
-              <a:t>Real multi-tenancy, SSO, AI Gateway with fallback</a:t>
-            </a:r>
-            <a:endParaRPr lang="en-US" sz="1100" dirty="0"/>
-          </a:p>
-          <a:p>
-            <a:pPr indent="0" marL="0">
-              <a:lnSpc>
-                <a:spcPct val="130000"/>
-              </a:lnSpc>
-              <a:spcAft>
-                <a:spcPts val="800"/>
-              </a:spcAft>
-              <a:buNone/>
-            </a:pPr>
-            <a:r>
-              <a:rPr lang="en-US" sz="1100" dirty="0">
-                <a:solidFill>
-                  <a:srgbClr val="1F2937"/>
-                </a:solidFill>
-                <a:latin typeface="Calibri" pitchFamily="34" charset="0"/>
-                <a:ea typeface="Calibri" pitchFamily="34" charset="-122"/>
-                <a:cs typeface="Calibri" pitchFamily="34" charset="-120"/>
-              </a:rPr>
-              <a:t>Preflight-check + reconciliation APIs</a:t>
-            </a:r>
-            <a:endParaRPr lang="en-US" sz="1100" dirty="0"/>
-          </a:p>
-        </p:txBody>
-      </p:sp>
-      <p:sp>
-        <p:nvSpPr>
-          <p:cNvPr id="10" name="Shape 8"/>
-          <p:cNvSpPr/>
-          <p:nvPr/>
-        </p:nvSpPr>
-        <p:spPr>
-          <a:xfrm>
-            <a:off x="4288536" y="2011680"/>
-            <a:ext cx="3611880" cy="4160520"/>
-          </a:xfrm>
-          <a:prstGeom prst="roundRect">
-            <a:avLst>
-              <a:gd name="adj" fmla="val 2532"/>
-            </a:avLst>
-          </a:prstGeom>
-          <a:solidFill>
-            <a:srgbClr val="F3F6F8"/>
-          </a:solidFill>
-          <a:ln/>
-        </p:spPr>
-      </p:sp>
-      <p:sp>
-        <p:nvSpPr>
-          <p:cNvPr id="11" name="Shape 9"/>
-          <p:cNvSpPr/>
-          <p:nvPr/>
-        </p:nvSpPr>
-        <p:spPr>
-          <a:xfrm>
-            <a:off x="4288536" y="2011680"/>
-            <a:ext cx="3611880" cy="502920"/>
-          </a:xfrm>
-          <a:prstGeom prst="roundRect">
-            <a:avLst>
-              <a:gd name="adj" fmla="val 18182"/>
-            </a:avLst>
-          </a:prstGeom>
-          <a:solidFill>
-            <a:srgbClr val="0A2A43"/>
-          </a:solidFill>
-          <a:ln/>
-        </p:spPr>
-      </p:sp>
-      <p:sp>
-        <p:nvSpPr>
-          <p:cNvPr id="12" name="Shape 10"/>
-          <p:cNvSpPr/>
-          <p:nvPr/>
-        </p:nvSpPr>
-        <p:spPr>
-          <a:xfrm>
-            <a:off x="4288536" y="2267712"/>
-            <a:ext cx="3611880" cy="246888"/>
-          </a:xfrm>
-          <a:prstGeom prst="rect">
-            <a:avLst/>
-          </a:prstGeom>
-          <a:solidFill>
-            <a:srgbClr val="0A2A43"/>
-          </a:solidFill>
-          <a:ln/>
-        </p:spPr>
-      </p:sp>
-      <p:sp>
-        <p:nvSpPr>
-          <p:cNvPr id="13" name="Text 11"/>
-          <p:cNvSpPr/>
-          <p:nvPr/>
-        </p:nvSpPr>
-        <p:spPr>
-          <a:xfrm>
-            <a:off x="4471416" y="2011680"/>
-            <a:ext cx="3246120" cy="502920"/>
-          </a:xfrm>
-          <a:prstGeom prst="rect">
-            <a:avLst/>
-          </a:prstGeom>
-          <a:noFill/>
-          <a:ln/>
-        </p:spPr>
-        <p:txBody>
-          <a:bodyPr wrap="square" rtlCol="0" anchor="ctr"/>
-          <a:lstStyle/>
-          <a:p>
-            <a:pPr indent="0" marL="0">
-              <a:buNone/>
-            </a:pPr>
-            <a:r>
-              <a:rPr lang="en-US" sz="1150" b="1" dirty="0">
-                <a:solidFill>
-                  <a:srgbClr val="FFFFFF"/>
-                </a:solidFill>
-                <a:latin typeface="Calibri" pitchFamily="34" charset="0"/>
-                <a:ea typeface="Calibri" pitchFamily="34" charset="-122"/>
-                <a:cs typeface="Calibri" pitchFamily="34" charset="-120"/>
-              </a:rPr>
-              <a:t>NEXT — DEEPENS GOVERNANCE</a:t>
-            </a:r>
-            <a:endParaRPr lang="en-US" sz="1150" dirty="0"/>
-          </a:p>
-        </p:txBody>
-      </p:sp>
-      <p:sp>
-        <p:nvSpPr>
-          <p:cNvPr id="14" name="Text 12"/>
-          <p:cNvSpPr/>
-          <p:nvPr/>
-        </p:nvSpPr>
-        <p:spPr>
-          <a:xfrm>
-            <a:off x="4489704" y="2697480"/>
-            <a:ext cx="3209544" cy="3246120"/>
-          </a:xfrm>
-          <a:prstGeom prst="rect">
-            <a:avLst/>
-          </a:prstGeom>
-          <a:noFill/>
-          <a:ln/>
-        </p:spPr>
-        <p:txBody>
-          <a:bodyPr wrap="square" rtlCol="0" anchor="ctr"/>
-          <a:lstStyle/>
-          <a:p>
-            <a:pPr marL="177800" indent="-177800">
-              <a:lnSpc>
-                <a:spcPct val="130000"/>
-              </a:lnSpc>
-              <a:spcAft>
-                <a:spcPts val="800"/>
-              </a:spcAft>
-              <a:buSzPct val="100000"/>
-              <a:buChar char="•"/>
-            </a:pPr>
-            <a:r>
-              <a:rPr lang="en-US" sz="1100" dirty="0">
-                <a:solidFill>
-                  <a:srgbClr val="1F2937"/>
-                </a:solidFill>
-                <a:latin typeface="Calibri" pitchFamily="34" charset="0"/>
-                <a:ea typeface="Calibri" pitchFamily="34" charset="-122"/>
-                <a:cs typeface="Calibri" pitchFamily="34" charset="-120"/>
-              </a:rPr>
-              <a:t>Governance templates per regulatory regime</a:t>
-            </a:r>
-            <a:endParaRPr lang="en-US" sz="1100" dirty="0"/>
-          </a:p>
-          <a:p>
-            <a:pPr indent="0" marL="0">
-              <a:lnSpc>
-                <a:spcPct val="130000"/>
-              </a:lnSpc>
-              <a:spcAft>
-                <a:spcPts val="800"/>
-              </a:spcAft>
-              <a:buNone/>
-            </a:pPr>
-            <a:r>
-              <a:rPr lang="en-US" sz="1100" dirty="0">
-                <a:solidFill>
-                  <a:srgbClr val="1F2937"/>
-                </a:solidFill>
-                <a:latin typeface="Calibri" pitchFamily="34" charset="0"/>
-                <a:ea typeface="Calibri" pitchFamily="34" charset="-122"/>
-                <a:cs typeface="Calibri" pitchFamily="34" charset="-120"/>
-              </a:rPr>
-              <a:t>Configurable PII patterns per org/region</a:t>
-            </a:r>
-            <a:endParaRPr lang="en-US" sz="1100" dirty="0"/>
-          </a:p>
-          <a:p>
-            <a:pPr indent="0" marL="0">
-              <a:lnSpc>
-                <a:spcPct val="130000"/>
-              </a:lnSpc>
-              <a:spcAft>
-                <a:spcPts val="800"/>
-              </a:spcAft>
-              <a:buNone/>
-            </a:pPr>
-            <a:r>
-              <a:rPr lang="en-US" sz="1100" dirty="0">
-                <a:solidFill>
-                  <a:srgbClr val="1F2937"/>
-                </a:solidFill>
-                <a:latin typeface="Calibri" pitchFamily="34" charset="0"/>
-                <a:ea typeface="Calibri" pitchFamily="34" charset="-122"/>
-                <a:cs typeface="Calibri" pitchFamily="34" charset="-120"/>
-              </a:rPr>
-              <a:t>Regulatory citation mapping</a:t>
-            </a:r>
-            <a:endParaRPr lang="en-US" sz="1100" dirty="0"/>
-          </a:p>
-          <a:p>
-            <a:pPr indent="0" marL="0">
-              <a:lnSpc>
-                <a:spcPct val="130000"/>
-              </a:lnSpc>
-              <a:spcAft>
-                <a:spcPts val="800"/>
-              </a:spcAft>
-              <a:buNone/>
-            </a:pPr>
-            <a:r>
-              <a:rPr lang="en-US" sz="1100" dirty="0">
-                <a:solidFill>
-                  <a:srgbClr val="1F2937"/>
-                </a:solidFill>
-                <a:latin typeface="Calibri" pitchFamily="34" charset="0"/>
-                <a:ea typeface="Calibri" pitchFamily="34" charset="-122"/>
-                <a:cs typeface="Calibri" pitchFamily="34" charset="-120"/>
-              </a:rPr>
-              <a:t>Incident workflow tied to the kill-switch</a:t>
-            </a:r>
-            <a:endParaRPr lang="en-US" sz="1100" dirty="0"/>
-          </a:p>
-          <a:p>
-            <a:pPr indent="0" marL="0">
-              <a:lnSpc>
-                <a:spcPct val="130000"/>
-              </a:lnSpc>
-              <a:spcAft>
-                <a:spcPts val="800"/>
-              </a:spcAft>
-              <a:buNone/>
-            </a:pPr>
-            <a:r>
-              <a:rPr lang="en-US" sz="1100" dirty="0">
-                <a:solidFill>
-                  <a:srgbClr val="1F2937"/>
-                </a:solidFill>
-                <a:latin typeface="Calibri" pitchFamily="34" charset="0"/>
-                <a:ea typeface="Calibri" pitchFamily="34" charset="-122"/>
-                <a:cs typeface="Calibri" pitchFamily="34" charset="-120"/>
-              </a:rPr>
-              <a:t>Aggregate portfolio risk rollup</a:t>
-            </a:r>
-            <a:endParaRPr lang="en-US" sz="1100" dirty="0"/>
-          </a:p>
-        </p:txBody>
-      </p:sp>
-      <p:sp>
-        <p:nvSpPr>
-          <p:cNvPr id="15" name="Shape 13"/>
-          <p:cNvSpPr/>
-          <p:nvPr/>
-        </p:nvSpPr>
-        <p:spPr>
-          <a:xfrm>
-            <a:off x="8119872" y="2011680"/>
-            <a:ext cx="3611880" cy="4160520"/>
-          </a:xfrm>
-          <a:prstGeom prst="roundRect">
-            <a:avLst>
-              <a:gd name="adj" fmla="val 2532"/>
-            </a:avLst>
-          </a:prstGeom>
-          <a:solidFill>
-            <a:srgbClr val="F3F6F8"/>
-          </a:solidFill>
-          <a:ln/>
-        </p:spPr>
-      </p:sp>
-      <p:sp>
-        <p:nvSpPr>
-          <p:cNvPr id="16" name="Shape 14"/>
-          <p:cNvSpPr/>
-          <p:nvPr/>
-        </p:nvSpPr>
-        <p:spPr>
-          <a:xfrm>
-            <a:off x="8119872" y="2011680"/>
-            <a:ext cx="3611880" cy="502920"/>
-          </a:xfrm>
-          <a:prstGeom prst="roundRect">
-            <a:avLst>
-              <a:gd name="adj" fmla="val 18182"/>
-            </a:avLst>
-          </a:prstGeom>
-          <a:solidFill>
-            <a:srgbClr val="6B7280"/>
-          </a:solidFill>
-          <a:ln/>
-        </p:spPr>
-      </p:sp>
-      <p:sp>
-        <p:nvSpPr>
-          <p:cNvPr id="17" name="Shape 15"/>
-          <p:cNvSpPr/>
-          <p:nvPr/>
-        </p:nvSpPr>
-        <p:spPr>
-          <a:xfrm>
-            <a:off x="8119872" y="2267712"/>
-            <a:ext cx="3611880" cy="246888"/>
-          </a:xfrm>
-          <a:prstGeom prst="rect">
-            <a:avLst/>
-          </a:prstGeom>
-          <a:solidFill>
-            <a:srgbClr val="6B7280"/>
-          </a:solidFill>
-          <a:ln/>
-        </p:spPr>
-      </p:sp>
-      <p:sp>
-        <p:nvSpPr>
-          <p:cNvPr id="18" name="Text 16"/>
-          <p:cNvSpPr/>
-          <p:nvPr/>
-        </p:nvSpPr>
-        <p:spPr>
-          <a:xfrm>
-            <a:off x="8302752" y="2011680"/>
-            <a:ext cx="3246120" cy="502920"/>
-          </a:xfrm>
-          <a:prstGeom prst="rect">
-            <a:avLst/>
-          </a:prstGeom>
-          <a:noFill/>
-          <a:ln/>
-        </p:spPr>
-        <p:txBody>
-          <a:bodyPr wrap="square" rtlCol="0" anchor="ctr"/>
-          <a:lstStyle/>
-          <a:p>
-            <a:pPr indent="0" marL="0">
-              <a:buNone/>
-            </a:pPr>
-            <a:r>
-              <a:rPr lang="en-US" sz="1150" b="1" dirty="0">
-                <a:solidFill>
-                  <a:srgbClr val="FFFFFF"/>
-                </a:solidFill>
-                <a:latin typeface="Calibri" pitchFamily="34" charset="0"/>
-                <a:ea typeface="Calibri" pitchFamily="34" charset="-122"/>
-                <a:cs typeface="Calibri" pitchFamily="34" charset="-120"/>
-              </a:rPr>
-              <a:t>LATER &amp; HARDENING</a:t>
-            </a:r>
-            <a:endParaRPr lang="en-US" sz="1150" dirty="0"/>
-          </a:p>
-        </p:txBody>
-      </p:sp>
-      <p:sp>
-        <p:nvSpPr>
-          <p:cNvPr id="19" name="Text 17"/>
-          <p:cNvSpPr/>
-          <p:nvPr/>
-        </p:nvSpPr>
-        <p:spPr>
-          <a:xfrm>
-            <a:off x="8321040" y="2697480"/>
-            <a:ext cx="3209544" cy="3246120"/>
-          </a:xfrm>
-          <a:prstGeom prst="rect">
-            <a:avLst/>
-          </a:prstGeom>
-          <a:noFill/>
-          <a:ln/>
-        </p:spPr>
-        <p:txBody>
-          <a:bodyPr wrap="square" rtlCol="0" anchor="ctr"/>
-          <a:lstStyle/>
-          <a:p>
-            <a:pPr marL="177800" indent="-177800">
-              <a:lnSpc>
-                <a:spcPct val="130000"/>
-              </a:lnSpc>
-              <a:spcAft>
-                <a:spcPts val="800"/>
-              </a:spcAft>
-              <a:buSzPct val="100000"/>
-              <a:buChar char="•"/>
-            </a:pPr>
-            <a:r>
-              <a:rPr lang="en-US" sz="1100" dirty="0">
-                <a:solidFill>
-                  <a:srgbClr val="1F2937"/>
-                </a:solidFill>
-                <a:latin typeface="Calibri" pitchFamily="34" charset="0"/>
-                <a:ea typeface="Calibri" pitchFamily="34" charset="-122"/>
-                <a:cs typeface="Calibri" pitchFamily="34" charset="-120"/>
-              </a:rPr>
-              <a:t>Intake &amp; reference architecture templates</a:t>
-            </a:r>
-            <a:endParaRPr lang="en-US" sz="1100" dirty="0"/>
-          </a:p>
-          <a:p>
-            <a:pPr indent="0" marL="0">
-              <a:lnSpc>
-                <a:spcPct val="130000"/>
-              </a:lnSpc>
-              <a:spcAft>
-                <a:spcPts val="800"/>
-              </a:spcAft>
-              <a:buNone/>
-            </a:pPr>
-            <a:r>
-              <a:rPr lang="en-US" sz="1100" dirty="0">
-                <a:solidFill>
-                  <a:srgbClr val="1F2937"/>
-                </a:solidFill>
-                <a:latin typeface="Calibri" pitchFamily="34" charset="0"/>
-                <a:ea typeface="Calibri" pitchFamily="34" charset="-122"/>
-                <a:cs typeface="Calibri" pitchFamily="34" charset="-120"/>
-              </a:rPr>
-              <a:t>Vendor/model blast-radius reverse lookup</a:t>
-            </a:r>
-            <a:endParaRPr lang="en-US" sz="1100" dirty="0"/>
-          </a:p>
-          <a:p>
-            <a:pPr indent="0" marL="0">
-              <a:lnSpc>
-                <a:spcPct val="130000"/>
-              </a:lnSpc>
-              <a:spcAft>
-                <a:spcPts val="800"/>
-              </a:spcAft>
-              <a:buNone/>
-            </a:pPr>
-            <a:r>
-              <a:rPr lang="en-US" sz="1100" dirty="0">
-                <a:solidFill>
-                  <a:srgbClr val="1F2937"/>
-                </a:solidFill>
-                <a:latin typeface="Calibri" pitchFamily="34" charset="0"/>
-                <a:ea typeface="Calibri" pitchFamily="34" charset="-122"/>
-                <a:cs typeface="Calibri" pitchFamily="34" charset="-120"/>
-              </a:rPr>
-              <a:t>Configurable approval workflows per org</a:t>
-            </a:r>
-            <a:endParaRPr lang="en-US" sz="1100" dirty="0"/>
-          </a:p>
-          <a:p>
-            <a:pPr indent="0" marL="0">
-              <a:lnSpc>
-                <a:spcPct val="130000"/>
-              </a:lnSpc>
-              <a:spcAft>
-                <a:spcPts val="800"/>
-              </a:spcAft>
-              <a:buNone/>
-            </a:pPr>
-            <a:r>
-              <a:rPr lang="en-US" sz="1100" dirty="0">
-                <a:solidFill>
-                  <a:srgbClr val="1F2937"/>
-                </a:solidFill>
-                <a:latin typeface="Calibri" pitchFamily="34" charset="0"/>
-                <a:ea typeface="Calibri" pitchFamily="34" charset="-122"/>
-                <a:cs typeface="Calibri" pitchFamily="34" charset="-120"/>
-              </a:rPr>
-              <a:t>Broader test coverage, accessibility audit, SCIM, per-tenant branding</a:t>
-            </a:r>
-            <a:endParaRPr lang="en-US" sz="1100" dirty="0"/>
-          </a:p>
-        </p:txBody>
-      </p:sp>
-      <p:sp>
-        <p:nvSpPr>
-          <p:cNvPr id="20" name="Text 18"/>
-          <p:cNvSpPr/>
-          <p:nvPr/>
-        </p:nvSpPr>
-        <p:spPr>
-          <a:xfrm>
-            <a:off x="548640" y="6492240"/>
-            <a:ext cx="5486400" cy="274320"/>
-          </a:xfrm>
-          <a:prstGeom prst="rect">
-            <a:avLst/>
-          </a:prstGeom>
-          <a:noFill/>
-          <a:ln/>
-        </p:spPr>
-        <p:txBody>
-          <a:bodyPr wrap="square" rtlCol="0" anchor="ctr"/>
-          <a:lstStyle/>
-          <a:p>
-            <a:pPr indent="0" marL="0">
-              <a:buNone/>
-            </a:pPr>
-            <a:r>
-              <a:rPr lang="en-US" sz="1000" dirty="0">
-                <a:solidFill>
-                  <a:srgbClr val="6B7280"/>
-                </a:solidFill>
-                <a:latin typeface="Calibri" pitchFamily="34" charset="0"/>
-                <a:ea typeface="Calibri" pitchFamily="34" charset="-122"/>
-                <a:cs typeface="Calibri" pitchFamily="34" charset="-120"/>
-              </a:rPr>
-              <a:t>EGPA — Enterprise Governance Platform for AI</a:t>
-            </a:r>
-            <a:endParaRPr lang="en-US" sz="1000" dirty="0"/>
-          </a:p>
-        </p:txBody>
-      </p:sp>
-      <p:sp>
-        <p:nvSpPr>
-          <p:cNvPr id="21" name="Text 19"/>
-          <p:cNvSpPr/>
-          <p:nvPr/>
-        </p:nvSpPr>
-        <p:spPr>
-          <a:xfrm>
-            <a:off x="11521440" y="6492240"/>
-            <a:ext cx="548640" cy="274320"/>
-          </a:xfrm>
-          <a:prstGeom prst="rect">
-            <a:avLst/>
-          </a:prstGeom>
-          <a:noFill/>
-          <a:ln/>
-        </p:spPr>
-        <p:txBody>
-          <a:bodyPr wrap="square" rtlCol="0" anchor="ctr"/>
-          <a:lstStyle/>
-          <a:p>
-            <a:pPr algn="r" indent="0" marL="0">
-              <a:buNone/>
-            </a:pPr>
-            <a:r>
-              <a:rPr lang="en-US" sz="1000" dirty="0">
-                <a:solidFill>
-                  <a:srgbClr val="6B7280"/>
-                </a:solidFill>
-                <a:latin typeface="Calibri" pitchFamily="34" charset="0"/>
-                <a:ea typeface="Calibri" pitchFamily="34" charset="-122"/>
-                <a:cs typeface="Calibri" pitchFamily="34" charset="-120"/>
-              </a:rPr>
-              <a:t>16</a:t>
-            </a:r>
-            <a:endParaRPr lang="en-US" sz="1000" dirty="0"/>
-          </a:p>
-        </p:txBody>
-      </p:sp>
-    </p:spTree>
-  </p:cSld>
-  <p:clrMapOvr>
-    <a:masterClrMapping/>
-  </p:clrMapOvr>
-</p:sld>
-</file>
-
-<file path=ppt/slides/slide18.xml><?xml version="1.0" encoding="utf-8"?>
-<p:sld xmlns:a="http://schemas.openxmlformats.org/drawingml/2006/main" xmlns:r="http://schemas.openxmlformats.org/officeDocument/2006/relationships" xmlns:p="http://schemas.openxmlformats.org/presentationml/2006/main">
-  <p:cSld name="Slide 18">
     <p:bg>
       <p:bgPr>
         <a:solidFill>
@@ -12397,7 +11502,7 @@
         <p:spPr>
           <a:xfrm>
             <a:off x="457200" y="548640"/>
-            <a:ext cx="10972800" cy="502920"/>
+            <a:ext cx="7315200" cy="502920"/>
           </a:xfrm>
           <a:prstGeom prst="rect">
             <a:avLst/>
@@ -12424,6 +11529,67 @@
               <a:t>Options and trade-offs</a:t>
             </a:r>
             <a:endParaRPr lang="en-US" sz="2400" dirty="0"/>
+          </a:p>
+        </p:txBody>
+      </p:sp>
+      <p:sp>
+        <p:nvSpPr>
+          <p:cNvPr id="4" name="Shape 2"/>
+          <p:cNvSpPr/>
+          <p:nvPr/>
+        </p:nvSpPr>
+        <p:spPr>
+          <a:xfrm>
+            <a:off x="8654796" y="950976"/>
+            <a:ext cx="1737360" cy="274320"/>
+          </a:xfrm>
+          <a:prstGeom prst="roundRect">
+            <a:avLst>
+              <a:gd name="adj" fmla="val 50000"/>
+            </a:avLst>
+          </a:prstGeom>
+          <a:solidFill>
+            <a:srgbClr val="1A9C94"/>
+          </a:solidFill>
+          <a:ln/>
+        </p:spPr>
+      </p:sp>
+      <p:sp>
+        <p:nvSpPr>
+          <p:cNvPr id="5" name="Text 3"/>
+          <p:cNvSpPr/>
+          <p:nvPr/>
+        </p:nvSpPr>
+        <p:spPr>
+          <a:xfrm>
+            <a:off x="8654796" y="950976"/>
+            <a:ext cx="1737360" cy="274320"/>
+          </a:xfrm>
+          <a:prstGeom prst="rect">
+            <a:avLst/>
+          </a:prstGeom>
+          <a:noFill/>
+          <a:ln/>
+        </p:spPr>
+        <p:txBody>
+          <a:bodyPr wrap="square" rtlCol="0" anchor="ctr"/>
+          <a:lstStyle/>
+          <a:p>
+            <a:pPr algn="ctr" indent="0" marL="0">
+              <a:buNone/>
+            </a:pPr>
+            <a:r>
+              <a:rPr lang="en-US" sz="950" b="1" spc="50" kern="0" dirty="0">
+                <a:solidFill>
+                  <a:srgbClr val="FFFFFF"/>
+                </a:solidFill>
+                <a:latin typeface="Calibri" pitchFamily="34" charset="0"/>
+                <a:ea typeface="Calibri" pitchFamily="34" charset="-122"/>
+                <a:cs typeface="Calibri" pitchFamily="34" charset="-120"/>
+              </a:rPr>
+              <a:t>THE PATH WE CHOSE</a:t>
+            </a:r>
+            <a:endParaRPr lang="en-US" sz="950" dirty="0"/>
           </a:p>
         </p:txBody>
       </p:sp>
@@ -12442,7 +11608,7 @@
           </p:nvPr>
         </p:nvGraphicFramePr>
         <p:xfrm>
-          <a:off x="457200" y="1234440"/>
+          <a:off x="457200" y="1298448"/>
           <a:ext cx="11274552" cy="914400"/>
         </p:xfrm>
         <a:graphic>
@@ -12450,12 +11616,12 @@
             <a:tbl>
               <a:tblPr/>
               <a:tblGrid>
-                <a:gridCol w="2103120"/>
-                <a:gridCol w="3054096"/>
-                <a:gridCol w="3054096"/>
-                <a:gridCol w="3063240"/>
+                <a:gridCol w="1828800"/>
+                <a:gridCol w="2514600"/>
+                <a:gridCol w="2514600"/>
+                <a:gridCol w="4416552"/>
               </a:tblGrid>
-              <a:tr h="822960">
+              <a:tr h="457200">
                 <a:tc>
                   <a:txBody>
                     <a:bodyPr/>
@@ -12520,7 +11686,7 @@
                       <a:tailEnd type="none" w="med" len="med"/>
                     </a:lnB>
                     <a:solidFill>
-                      <a:srgbClr val="0A2A43"/>
+                      <a:srgbClr val="071B2E"/>
                     </a:solidFill>
                   </a:tcPr>
                 </a:tc>
@@ -12535,7 +11701,7 @@
                       <a:r>
                         <a:rPr lang="en-US" sz="1050" b="1" dirty="0">
                           <a:solidFill>
-                            <a:srgbClr val="FFFFFF"/>
+                            <a:srgbClr val="9FB0C3"/>
                           </a:solidFill>
                           <a:latin typeface="Calibri" pitchFamily="34" charset="0"/>
                           <a:ea typeface="Calibri" pitchFamily="34" charset="-122"/>
@@ -12588,7 +11754,7 @@
                       <a:tailEnd type="none" w="med" len="med"/>
                     </a:lnB>
                     <a:solidFill>
-                      <a:srgbClr val="0A2A43"/>
+                      <a:srgbClr val="071B2E"/>
                     </a:solidFill>
                   </a:tcPr>
                 </a:tc>
@@ -12603,7 +11769,7 @@
                       <a:r>
                         <a:rPr lang="en-US" sz="1050" b="1" dirty="0">
                           <a:solidFill>
-                            <a:srgbClr val="FFFFFF"/>
+                            <a:srgbClr val="9FB0C3"/>
                           </a:solidFill>
                           <a:latin typeface="Calibri" pitchFamily="34" charset="0"/>
                           <a:ea typeface="Calibri" pitchFamily="34" charset="-122"/>
@@ -12656,7 +11822,7 @@
                       <a:tailEnd type="none" w="med" len="med"/>
                     </a:lnB>
                     <a:solidFill>
-                      <a:srgbClr val="0A2A43"/>
+                      <a:srgbClr val="071B2E"/>
                     </a:solidFill>
                   </a:tcPr>
                 </a:tc>
@@ -12724,12 +11890,12 @@
                       <a:tailEnd type="none" w="med" len="med"/>
                     </a:lnB>
                     <a:solidFill>
-                      <a:srgbClr val="0A2A43"/>
+                      <a:srgbClr val="1A9C94"/>
                     </a:solidFill>
                   </a:tcPr>
                 </a:tc>
               </a:tr>
-              <a:tr h="822960">
+              <a:tr h="685800">
                 <a:tc>
                   <a:txBody>
                     <a:bodyPr/>
@@ -12739,9 +11905,9 @@
                         <a:buNone/>
                       </a:pPr>
                       <a:r>
-                        <a:rPr lang="en-US" sz="1000" b="1" dirty="0">
+                        <a:rPr lang="en-US" sz="1050" b="1" dirty="0">
                           <a:solidFill>
-                            <a:srgbClr val="1F2937"/>
+                            <a:srgbClr val="0A2A43"/>
                           </a:solidFill>
                           <a:latin typeface="Calibri" pitchFamily="34" charset="0"/>
                           <a:ea typeface="Calibri" pitchFamily="34" charset="-122"/>
@@ -12749,7 +11915,7 @@
                         </a:rPr>
                         <a:t>Implementation time</a:t>
                       </a:r>
-                      <a:endParaRPr lang="en-US" sz="1000" dirty="0">
+                      <a:endParaRPr lang="en-US" sz="1050" dirty="0">
                         <a:latin typeface="Calibri" charset="0"/>
                         <a:ea typeface="Calibri" charset="0"/>
                         <a:cs typeface="Calibri" charset="0"/>
@@ -12809,7 +11975,7 @@
                       <a:r>
                         <a:rPr lang="en-US" sz="1000" dirty="0">
                           <a:solidFill>
-                            <a:srgbClr val="1F2937"/>
+                            <a:srgbClr val="6B7280"/>
                           </a:solidFill>
                           <a:latin typeface="Calibri" pitchFamily="34" charset="0"/>
                           <a:ea typeface="Calibri" pitchFamily="34" charset="-122"/>
@@ -12877,7 +12043,7 @@
                       <a:r>
                         <a:rPr lang="en-US" sz="1000" dirty="0">
                           <a:solidFill>
-                            <a:srgbClr val="1F2937"/>
+                            <a:srgbClr val="6B7280"/>
                           </a:solidFill>
                           <a:latin typeface="Calibri" pitchFamily="34" charset="0"/>
                           <a:ea typeface="Calibri" pitchFamily="34" charset="-122"/>
@@ -12886,6 +12052,418 @@
                         <a:t>Medium — vendor config + integration</a:t>
                       </a:r>
                       <a:endParaRPr lang="en-US" sz="1000" dirty="0">
+                        <a:latin typeface="Calibri" charset="0"/>
+                        <a:ea typeface="Calibri" charset="0"/>
+                        <a:cs typeface="Calibri" charset="0"/>
+                      </a:endParaRPr>
+                    </a:p>
+                  </a:txBody>
+                  <a:tcPr marL="91440" marR="91440" marT="45720" marB="45720" anchor="ctr">
+                    <a:lnL w="9525" cap="flat" cmpd="sng" algn="ctr">
+                      <a:solidFill>
+                        <a:srgbClr val="E3E8EC"/>
+                      </a:solidFill>
+                      <a:prstDash val="solid"/>
+                      <a:round/>
+                      <a:headEnd type="none" w="med" len="med"/>
+                      <a:tailEnd type="none" w="med" len="med"/>
+                    </a:lnL>
+                    <a:lnR w="9525" cap="flat" cmpd="sng" algn="ctr">
+                      <a:solidFill>
+                        <a:srgbClr val="E3E8EC"/>
+                      </a:solidFill>
+                      <a:prstDash val="solid"/>
+                      <a:round/>
+                      <a:headEnd type="none" w="med" len="med"/>
+                      <a:tailEnd type="none" w="med" len="med"/>
+                    </a:lnR>
+                    <a:lnT w="9525" cap="flat" cmpd="sng" algn="ctr">
+                      <a:solidFill>
+                        <a:srgbClr val="E3E8EC"/>
+                      </a:solidFill>
+                      <a:prstDash val="solid"/>
+                      <a:round/>
+                      <a:headEnd type="none" w="med" len="med"/>
+                      <a:tailEnd type="none" w="med" len="med"/>
+                    </a:lnT>
+                    <a:lnB w="9525" cap="flat" cmpd="sng" algn="ctr">
+                      <a:solidFill>
+                        <a:srgbClr val="E3E8EC"/>
+                      </a:solidFill>
+                      <a:prstDash val="solid"/>
+                      <a:round/>
+                      <a:headEnd type="none" w="med" len="med"/>
+                      <a:tailEnd type="none" w="med" len="med"/>
+                    </a:lnB>
+                    <a:solidFill>
+                      <a:srgbClr val="FFFFFF"/>
+                    </a:solidFill>
+                  </a:tcPr>
+                </a:tc>
+                <a:tc>
+                  <a:txBody>
+                    <a:bodyPr/>
+                    <a:lstStyle/>
+                    <a:p>
+                      <a:pPr indent="0" marL="0">
+                        <a:buNone/>
+                      </a:pPr>
+                      <a:r>
+                        <a:rPr lang="en-US" sz="1050" dirty="0">
+                          <a:solidFill>
+                            <a:srgbClr val="FFFFFF"/>
+                          </a:solidFill>
+                          <a:latin typeface="Calibri" pitchFamily="34" charset="0"/>
+                          <a:ea typeface="Calibri" pitchFamily="34" charset="-122"/>
+                          <a:cs typeface="Calibri" pitchFamily="34" charset="-120"/>
+                        </a:rPr>
+                        <a:t>Slowest to first value, sequenced on our own terms</a:t>
+                      </a:r>
+                      <a:endParaRPr lang="en-US" sz="1050" dirty="0">
+                        <a:latin typeface="Calibri" charset="0"/>
+                        <a:ea typeface="Calibri" charset="0"/>
+                        <a:cs typeface="Calibri" charset="0"/>
+                      </a:endParaRPr>
+                    </a:p>
+                  </a:txBody>
+                  <a:tcPr marL="91440" marR="91440" marT="45720" marB="45720" anchor="ctr">
+                    <a:lnL w="9525" cap="flat" cmpd="sng" algn="ctr">
+                      <a:solidFill>
+                        <a:srgbClr val="E3E8EC"/>
+                      </a:solidFill>
+                      <a:prstDash val="solid"/>
+                      <a:round/>
+                      <a:headEnd type="none" w="med" len="med"/>
+                      <a:tailEnd type="none" w="med" len="med"/>
+                    </a:lnL>
+                    <a:lnR w="9525" cap="flat" cmpd="sng" algn="ctr">
+                      <a:solidFill>
+                        <a:srgbClr val="E3E8EC"/>
+                      </a:solidFill>
+                      <a:prstDash val="solid"/>
+                      <a:round/>
+                      <a:headEnd type="none" w="med" len="med"/>
+                      <a:tailEnd type="none" w="med" len="med"/>
+                    </a:lnR>
+                    <a:lnT w="9525" cap="flat" cmpd="sng" algn="ctr">
+                      <a:solidFill>
+                        <a:srgbClr val="E3E8EC"/>
+                      </a:solidFill>
+                      <a:prstDash val="solid"/>
+                      <a:round/>
+                      <a:headEnd type="none" w="med" len="med"/>
+                      <a:tailEnd type="none" w="med" len="med"/>
+                    </a:lnT>
+                    <a:lnB w="9525" cap="flat" cmpd="sng" algn="ctr">
+                      <a:solidFill>
+                        <a:srgbClr val="E3E8EC"/>
+                      </a:solidFill>
+                      <a:prstDash val="solid"/>
+                      <a:round/>
+                      <a:headEnd type="none" w="med" len="med"/>
+                      <a:tailEnd type="none" w="med" len="med"/>
+                    </a:lnB>
+                    <a:solidFill>
+                      <a:srgbClr val="0A2A43"/>
+                    </a:solidFill>
+                  </a:tcPr>
+                </a:tc>
+              </a:tr>
+              <a:tr h="685800">
+                <a:tc>
+                  <a:txBody>
+                    <a:bodyPr/>
+                    <a:lstStyle/>
+                    <a:p>
+                      <a:pPr indent="0" marL="0">
+                        <a:buNone/>
+                      </a:pPr>
+                      <a:r>
+                        <a:rPr lang="en-US" sz="1050" b="1" dirty="0">
+                          <a:solidFill>
+                            <a:srgbClr val="0A2A43"/>
+                          </a:solidFill>
+                          <a:latin typeface="Calibri" pitchFamily="34" charset="0"/>
+                          <a:ea typeface="Calibri" pitchFamily="34" charset="-122"/>
+                          <a:cs typeface="Calibri" pitchFamily="34" charset="-120"/>
+                        </a:rPr>
+                        <a:t>Cost profile</a:t>
+                      </a:r>
+                      <a:endParaRPr lang="en-US" sz="1050" dirty="0">
+                        <a:latin typeface="Calibri" charset="0"/>
+                        <a:ea typeface="Calibri" charset="0"/>
+                        <a:cs typeface="Calibri" charset="0"/>
+                      </a:endParaRPr>
+                    </a:p>
+                  </a:txBody>
+                  <a:tcPr marL="91440" marR="91440" marT="45720" marB="45720" anchor="ctr">
+                    <a:lnL w="9525" cap="flat" cmpd="sng" algn="ctr">
+                      <a:solidFill>
+                        <a:srgbClr val="E3E8EC"/>
+                      </a:solidFill>
+                      <a:prstDash val="solid"/>
+                      <a:round/>
+                      <a:headEnd type="none" w="med" len="med"/>
+                      <a:tailEnd type="none" w="med" len="med"/>
+                    </a:lnL>
+                    <a:lnR w="9525" cap="flat" cmpd="sng" algn="ctr">
+                      <a:solidFill>
+                        <a:srgbClr val="E3E8EC"/>
+                      </a:solidFill>
+                      <a:prstDash val="solid"/>
+                      <a:round/>
+                      <a:headEnd type="none" w="med" len="med"/>
+                      <a:tailEnd type="none" w="med" len="med"/>
+                    </a:lnR>
+                    <a:lnT w="9525" cap="flat" cmpd="sng" algn="ctr">
+                      <a:solidFill>
+                        <a:srgbClr val="E3E8EC"/>
+                      </a:solidFill>
+                      <a:prstDash val="solid"/>
+                      <a:round/>
+                      <a:headEnd type="none" w="med" len="med"/>
+                      <a:tailEnd type="none" w="med" len="med"/>
+                    </a:lnT>
+                    <a:lnB w="9525" cap="flat" cmpd="sng" algn="ctr">
+                      <a:solidFill>
+                        <a:srgbClr val="E3E8EC"/>
+                      </a:solidFill>
+                      <a:prstDash val="solid"/>
+                      <a:round/>
+                      <a:headEnd type="none" w="med" len="med"/>
+                      <a:tailEnd type="none" w="med" len="med"/>
+                    </a:lnB>
+                    <a:solidFill>
+                      <a:srgbClr val="F3F6F8"/>
+                    </a:solidFill>
+                  </a:tcPr>
+                </a:tc>
+                <a:tc>
+                  <a:txBody>
+                    <a:bodyPr/>
+                    <a:lstStyle/>
+                    <a:p>
+                      <a:pPr indent="0" marL="0">
+                        <a:buNone/>
+                      </a:pPr>
+                      <a:r>
+                        <a:rPr lang="en-US" sz="1000" dirty="0">
+                          <a:solidFill>
+                            <a:srgbClr val="6B7280"/>
+                          </a:solidFill>
+                          <a:latin typeface="Calibri" pitchFamily="34" charset="0"/>
+                          <a:ea typeface="Calibri" pitchFamily="34" charset="-122"/>
+                          <a:cs typeface="Calibri" pitchFamily="34" charset="-120"/>
+                        </a:rPr>
+                        <a:t>Lowest incremental — licensing sunk</a:t>
+                      </a:r>
+                      <a:endParaRPr lang="en-US" sz="1000" dirty="0">
+                        <a:latin typeface="Calibri" charset="0"/>
+                        <a:ea typeface="Calibri" charset="0"/>
+                        <a:cs typeface="Calibri" charset="0"/>
+                      </a:endParaRPr>
+                    </a:p>
+                  </a:txBody>
+                  <a:tcPr marL="91440" marR="91440" marT="45720" marB="45720" anchor="ctr">
+                    <a:lnL w="9525" cap="flat" cmpd="sng" algn="ctr">
+                      <a:solidFill>
+                        <a:srgbClr val="E3E8EC"/>
+                      </a:solidFill>
+                      <a:prstDash val="solid"/>
+                      <a:round/>
+                      <a:headEnd type="none" w="med" len="med"/>
+                      <a:tailEnd type="none" w="med" len="med"/>
+                    </a:lnL>
+                    <a:lnR w="9525" cap="flat" cmpd="sng" algn="ctr">
+                      <a:solidFill>
+                        <a:srgbClr val="E3E8EC"/>
+                      </a:solidFill>
+                      <a:prstDash val="solid"/>
+                      <a:round/>
+                      <a:headEnd type="none" w="med" len="med"/>
+                      <a:tailEnd type="none" w="med" len="med"/>
+                    </a:lnR>
+                    <a:lnT w="9525" cap="flat" cmpd="sng" algn="ctr">
+                      <a:solidFill>
+                        <a:srgbClr val="E3E8EC"/>
+                      </a:solidFill>
+                      <a:prstDash val="solid"/>
+                      <a:round/>
+                      <a:headEnd type="none" w="med" len="med"/>
+                      <a:tailEnd type="none" w="med" len="med"/>
+                    </a:lnT>
+                    <a:lnB w="9525" cap="flat" cmpd="sng" algn="ctr">
+                      <a:solidFill>
+                        <a:srgbClr val="E3E8EC"/>
+                      </a:solidFill>
+                      <a:prstDash val="solid"/>
+                      <a:round/>
+                      <a:headEnd type="none" w="med" len="med"/>
+                      <a:tailEnd type="none" w="med" len="med"/>
+                    </a:lnB>
+                    <a:solidFill>
+                      <a:srgbClr val="F3F6F8"/>
+                    </a:solidFill>
+                  </a:tcPr>
+                </a:tc>
+                <a:tc>
+                  <a:txBody>
+                    <a:bodyPr/>
+                    <a:lstStyle/>
+                    <a:p>
+                      <a:pPr indent="0" marL="0">
+                        <a:buNone/>
+                      </a:pPr>
+                      <a:r>
+                        <a:rPr lang="en-US" sz="1000" dirty="0">
+                          <a:solidFill>
+                            <a:srgbClr val="6B7280"/>
+                          </a:solidFill>
+                          <a:latin typeface="Calibri" pitchFamily="34" charset="0"/>
+                          <a:ea typeface="Calibri" pitchFamily="34" charset="-122"/>
+                          <a:cs typeface="Calibri" pitchFamily="34" charset="-120"/>
+                        </a:rPr>
+                        <a:t>Recurring license, per-seat/model</a:t>
+                      </a:r>
+                      <a:endParaRPr lang="en-US" sz="1000" dirty="0">
+                        <a:latin typeface="Calibri" charset="0"/>
+                        <a:ea typeface="Calibri" charset="0"/>
+                        <a:cs typeface="Calibri" charset="0"/>
+                      </a:endParaRPr>
+                    </a:p>
+                  </a:txBody>
+                  <a:tcPr marL="91440" marR="91440" marT="45720" marB="45720" anchor="ctr">
+                    <a:lnL w="9525" cap="flat" cmpd="sng" algn="ctr">
+                      <a:solidFill>
+                        <a:srgbClr val="E3E8EC"/>
+                      </a:solidFill>
+                      <a:prstDash val="solid"/>
+                      <a:round/>
+                      <a:headEnd type="none" w="med" len="med"/>
+                      <a:tailEnd type="none" w="med" len="med"/>
+                    </a:lnL>
+                    <a:lnR w="9525" cap="flat" cmpd="sng" algn="ctr">
+                      <a:solidFill>
+                        <a:srgbClr val="E3E8EC"/>
+                      </a:solidFill>
+                      <a:prstDash val="solid"/>
+                      <a:round/>
+                      <a:headEnd type="none" w="med" len="med"/>
+                      <a:tailEnd type="none" w="med" len="med"/>
+                    </a:lnR>
+                    <a:lnT w="9525" cap="flat" cmpd="sng" algn="ctr">
+                      <a:solidFill>
+                        <a:srgbClr val="E3E8EC"/>
+                      </a:solidFill>
+                      <a:prstDash val="solid"/>
+                      <a:round/>
+                      <a:headEnd type="none" w="med" len="med"/>
+                      <a:tailEnd type="none" w="med" len="med"/>
+                    </a:lnT>
+                    <a:lnB w="9525" cap="flat" cmpd="sng" algn="ctr">
+                      <a:solidFill>
+                        <a:srgbClr val="E3E8EC"/>
+                      </a:solidFill>
+                      <a:prstDash val="solid"/>
+                      <a:round/>
+                      <a:headEnd type="none" w="med" len="med"/>
+                      <a:tailEnd type="none" w="med" len="med"/>
+                    </a:lnB>
+                    <a:solidFill>
+                      <a:srgbClr val="F3F6F8"/>
+                    </a:solidFill>
+                  </a:tcPr>
+                </a:tc>
+                <a:tc>
+                  <a:txBody>
+                    <a:bodyPr/>
+                    <a:lstStyle/>
+                    <a:p>
+                      <a:pPr indent="0" marL="0">
+                        <a:buNone/>
+                      </a:pPr>
+                      <a:r>
+                        <a:rPr lang="en-US" sz="1050" dirty="0">
+                          <a:solidFill>
+                            <a:srgbClr val="FFFFFF"/>
+                          </a:solidFill>
+                          <a:latin typeface="Calibri" pitchFamily="34" charset="0"/>
+                          <a:ea typeface="Calibri" pitchFamily="34" charset="-122"/>
+                          <a:cs typeface="Calibri" pitchFamily="34" charset="-120"/>
+                        </a:rPr>
+                        <a:t>Upfront investment, no license, internal ownership</a:t>
+                      </a:r>
+                      <a:endParaRPr lang="en-US" sz="1050" dirty="0">
+                        <a:latin typeface="Calibri" charset="0"/>
+                        <a:ea typeface="Calibri" charset="0"/>
+                        <a:cs typeface="Calibri" charset="0"/>
+                      </a:endParaRPr>
+                    </a:p>
+                  </a:txBody>
+                  <a:tcPr marL="91440" marR="91440" marT="45720" marB="45720" anchor="ctr">
+                    <a:lnL w="9525" cap="flat" cmpd="sng" algn="ctr">
+                      <a:solidFill>
+                        <a:srgbClr val="E3E8EC"/>
+                      </a:solidFill>
+                      <a:prstDash val="solid"/>
+                      <a:round/>
+                      <a:headEnd type="none" w="med" len="med"/>
+                      <a:tailEnd type="none" w="med" len="med"/>
+                    </a:lnL>
+                    <a:lnR w="9525" cap="flat" cmpd="sng" algn="ctr">
+                      <a:solidFill>
+                        <a:srgbClr val="E3E8EC"/>
+                      </a:solidFill>
+                      <a:prstDash val="solid"/>
+                      <a:round/>
+                      <a:headEnd type="none" w="med" len="med"/>
+                      <a:tailEnd type="none" w="med" len="med"/>
+                    </a:lnR>
+                    <a:lnT w="9525" cap="flat" cmpd="sng" algn="ctr">
+                      <a:solidFill>
+                        <a:srgbClr val="E3E8EC"/>
+                      </a:solidFill>
+                      <a:prstDash val="solid"/>
+                      <a:round/>
+                      <a:headEnd type="none" w="med" len="med"/>
+                      <a:tailEnd type="none" w="med" len="med"/>
+                    </a:lnT>
+                    <a:lnB w="9525" cap="flat" cmpd="sng" algn="ctr">
+                      <a:solidFill>
+                        <a:srgbClr val="E3E8EC"/>
+                      </a:solidFill>
+                      <a:prstDash val="solid"/>
+                      <a:round/>
+                      <a:headEnd type="none" w="med" len="med"/>
+                      <a:tailEnd type="none" w="med" len="med"/>
+                    </a:lnB>
+                    <a:solidFill>
+                      <a:srgbClr val="0A2A43"/>
+                    </a:solidFill>
+                  </a:tcPr>
+                </a:tc>
+              </a:tr>
+              <a:tr h="685800">
+                <a:tc>
+                  <a:txBody>
+                    <a:bodyPr/>
+                    <a:lstStyle/>
+                    <a:p>
+                      <a:pPr indent="0" marL="0">
+                        <a:buNone/>
+                      </a:pPr>
+                      <a:r>
+                        <a:rPr lang="en-US" sz="1050" b="1" dirty="0">
+                          <a:solidFill>
+                            <a:srgbClr val="0A2A43"/>
+                          </a:solidFill>
+                          <a:latin typeface="Calibri" pitchFamily="34" charset="0"/>
+                          <a:ea typeface="Calibri" pitchFamily="34" charset="-122"/>
+                          <a:cs typeface="Calibri" pitchFamily="34" charset="-120"/>
+                        </a:rPr>
+                        <a:t>Integration complexity</a:t>
+                      </a:r>
+                      <a:endParaRPr lang="en-US" sz="1050" dirty="0">
                         <a:latin typeface="Calibri" charset="0"/>
                         <a:ea typeface="Calibri" charset="0"/>
                         <a:cs typeface="Calibri" charset="0"/>
@@ -12945,13 +12523,13 @@
                       <a:r>
                         <a:rPr lang="en-US" sz="1000" dirty="0">
                           <a:solidFill>
-                            <a:srgbClr val="1F2937"/>
+                            <a:srgbClr val="6B7280"/>
                           </a:solidFill>
                           <a:latin typeface="Calibri" pitchFamily="34" charset="0"/>
                           <a:ea typeface="Calibri" pitchFamily="34" charset="-122"/>
                           <a:cs typeface="Calibri" pitchFamily="34" charset="-120"/>
                         </a:rPr>
-                        <a:t>Slowest to first value, sequenced on our own terms</a:t>
+                        <a:t>Low, but AI runtime concepts aren't native</a:t>
                       </a:r>
                       <a:endParaRPr lang="en-US" sz="1000" dirty="0">
                         <a:latin typeface="Calibri" charset="0"/>
@@ -13002,8 +12580,6 @@
                     </a:solidFill>
                   </a:tcPr>
                 </a:tc>
-              </a:tr>
-              <a:tr h="822960">
                 <a:tc>
                   <a:txBody>
                     <a:bodyPr/>
@@ -13013,17 +12589,155 @@
                         <a:buNone/>
                       </a:pPr>
                       <a:r>
-                        <a:rPr lang="en-US" sz="1000" b="1" dirty="0">
+                        <a:rPr lang="en-US" sz="1000" dirty="0">
                           <a:solidFill>
-                            <a:srgbClr val="1F2937"/>
+                            <a:srgbClr val="6B7280"/>
                           </a:solidFill>
                           <a:latin typeface="Calibri" pitchFamily="34" charset="0"/>
                           <a:ea typeface="Calibri" pitchFamily="34" charset="-122"/>
                           <a:cs typeface="Calibri" pitchFamily="34" charset="-120"/>
                         </a:rPr>
-                        <a:t>Cost profile</a:t>
+                        <a:t>Medium-high — vendor didn't design for our Gateway</a:t>
                       </a:r>
                       <a:endParaRPr lang="en-US" sz="1000" dirty="0">
+                        <a:latin typeface="Calibri" charset="0"/>
+                        <a:ea typeface="Calibri" charset="0"/>
+                        <a:cs typeface="Calibri" charset="0"/>
+                      </a:endParaRPr>
+                    </a:p>
+                  </a:txBody>
+                  <a:tcPr marL="91440" marR="91440" marT="45720" marB="45720" anchor="ctr">
+                    <a:lnL w="9525" cap="flat" cmpd="sng" algn="ctr">
+                      <a:solidFill>
+                        <a:srgbClr val="E3E8EC"/>
+                      </a:solidFill>
+                      <a:prstDash val="solid"/>
+                      <a:round/>
+                      <a:headEnd type="none" w="med" len="med"/>
+                      <a:tailEnd type="none" w="med" len="med"/>
+                    </a:lnL>
+                    <a:lnR w="9525" cap="flat" cmpd="sng" algn="ctr">
+                      <a:solidFill>
+                        <a:srgbClr val="E3E8EC"/>
+                      </a:solidFill>
+                      <a:prstDash val="solid"/>
+                      <a:round/>
+                      <a:headEnd type="none" w="med" len="med"/>
+                      <a:tailEnd type="none" w="med" len="med"/>
+                    </a:lnR>
+                    <a:lnT w="9525" cap="flat" cmpd="sng" algn="ctr">
+                      <a:solidFill>
+                        <a:srgbClr val="E3E8EC"/>
+                      </a:solidFill>
+                      <a:prstDash val="solid"/>
+                      <a:round/>
+                      <a:headEnd type="none" w="med" len="med"/>
+                      <a:tailEnd type="none" w="med" len="med"/>
+                    </a:lnT>
+                    <a:lnB w="9525" cap="flat" cmpd="sng" algn="ctr">
+                      <a:solidFill>
+                        <a:srgbClr val="E3E8EC"/>
+                      </a:solidFill>
+                      <a:prstDash val="solid"/>
+                      <a:round/>
+                      <a:headEnd type="none" w="med" len="med"/>
+                      <a:tailEnd type="none" w="med" len="med"/>
+                    </a:lnB>
+                    <a:solidFill>
+                      <a:srgbClr val="FFFFFF"/>
+                    </a:solidFill>
+                  </a:tcPr>
+                </a:tc>
+                <a:tc>
+                  <a:txBody>
+                    <a:bodyPr/>
+                    <a:lstStyle/>
+                    <a:p>
+                      <a:pPr indent="0" marL="0">
+                        <a:buNone/>
+                      </a:pPr>
+                      <a:r>
+                        <a:rPr lang="en-US" sz="1050" dirty="0">
+                          <a:solidFill>
+                            <a:srgbClr val="FFFFFF"/>
+                          </a:solidFill>
+                          <a:latin typeface="Calibri" pitchFamily="34" charset="0"/>
+                          <a:ea typeface="Calibri" pitchFamily="34" charset="-122"/>
+                          <a:cs typeface="Calibri" pitchFamily="34" charset="-120"/>
+                        </a:rPr>
+                        <a:t>Low, by construction — built around our own stack</a:t>
+                      </a:r>
+                      <a:endParaRPr lang="en-US" sz="1050" dirty="0">
+                        <a:latin typeface="Calibri" charset="0"/>
+                        <a:ea typeface="Calibri" charset="0"/>
+                        <a:cs typeface="Calibri" charset="0"/>
+                      </a:endParaRPr>
+                    </a:p>
+                  </a:txBody>
+                  <a:tcPr marL="91440" marR="91440" marT="45720" marB="45720" anchor="ctr">
+                    <a:lnL w="9525" cap="flat" cmpd="sng" algn="ctr">
+                      <a:solidFill>
+                        <a:srgbClr val="E3E8EC"/>
+                      </a:solidFill>
+                      <a:prstDash val="solid"/>
+                      <a:round/>
+                      <a:headEnd type="none" w="med" len="med"/>
+                      <a:tailEnd type="none" w="med" len="med"/>
+                    </a:lnL>
+                    <a:lnR w="9525" cap="flat" cmpd="sng" algn="ctr">
+                      <a:solidFill>
+                        <a:srgbClr val="E3E8EC"/>
+                      </a:solidFill>
+                      <a:prstDash val="solid"/>
+                      <a:round/>
+                      <a:headEnd type="none" w="med" len="med"/>
+                      <a:tailEnd type="none" w="med" len="med"/>
+                    </a:lnR>
+                    <a:lnT w="9525" cap="flat" cmpd="sng" algn="ctr">
+                      <a:solidFill>
+                        <a:srgbClr val="E3E8EC"/>
+                      </a:solidFill>
+                      <a:prstDash val="solid"/>
+                      <a:round/>
+                      <a:headEnd type="none" w="med" len="med"/>
+                      <a:tailEnd type="none" w="med" len="med"/>
+                    </a:lnT>
+                    <a:lnB w="9525" cap="flat" cmpd="sng" algn="ctr">
+                      <a:solidFill>
+                        <a:srgbClr val="E3E8EC"/>
+                      </a:solidFill>
+                      <a:prstDash val="solid"/>
+                      <a:round/>
+                      <a:headEnd type="none" w="med" len="med"/>
+                      <a:tailEnd type="none" w="med" len="med"/>
+                    </a:lnB>
+                    <a:solidFill>
+                      <a:srgbClr val="0A2A43"/>
+                    </a:solidFill>
+                  </a:tcPr>
+                </a:tc>
+              </a:tr>
+              <a:tr h="685800">
+                <a:tc>
+                  <a:txBody>
+                    <a:bodyPr/>
+                    <a:lstStyle/>
+                    <a:p>
+                      <a:pPr indent="0" marL="0">
+                        <a:buNone/>
+                      </a:pPr>
+                      <a:r>
+                        <a:rPr lang="en-US" sz="1050" b="1" dirty="0">
+                          <a:solidFill>
+                            <a:srgbClr val="0A2A43"/>
+                          </a:solidFill>
+                          <a:latin typeface="Calibri" pitchFamily="34" charset="0"/>
+                          <a:ea typeface="Calibri" pitchFamily="34" charset="-122"/>
+                          <a:cs typeface="Calibri" pitchFamily="34" charset="-120"/>
+                        </a:rPr>
+                        <a:t>Flexibility</a:t>
+                      </a:r>
+                      <a:endParaRPr lang="en-US" sz="1050" dirty="0">
                         <a:latin typeface="Calibri" charset="0"/>
                         <a:ea typeface="Calibri" charset="0"/>
                         <a:cs typeface="Calibri" charset="0"/>
@@ -13083,13 +12797,13 @@
                       <a:r>
                         <a:rPr lang="en-US" sz="1000" dirty="0">
                           <a:solidFill>
-                            <a:srgbClr val="1F2937"/>
+                            <a:srgbClr val="6B7280"/>
                           </a:solidFill>
                           <a:latin typeface="Calibri" pitchFamily="34" charset="0"/>
                           <a:ea typeface="Calibri" pitchFamily="34" charset="-122"/>
                           <a:cs typeface="Calibri" pitchFamily="34" charset="-120"/>
                         </a:rPr>
-                        <a:t>Lowest incremental — licensing sunk</a:t>
+                        <a:t>Constrained to the host platform</a:t>
                       </a:r>
                       <a:endParaRPr lang="en-US" sz="1000" dirty="0">
                         <a:latin typeface="Calibri" charset="0"/>
@@ -13151,15 +12865,427 @@
                       <a:r>
                         <a:rPr lang="en-US" sz="1000" dirty="0">
                           <a:solidFill>
-                            <a:srgbClr val="1F2937"/>
+                            <a:srgbClr val="6B7280"/>
                           </a:solidFill>
                           <a:latin typeface="Calibri" pitchFamily="34" charset="0"/>
                           <a:ea typeface="Calibri" pitchFamily="34" charset="-122"/>
                           <a:cs typeface="Calibri" pitchFamily="34" charset="-120"/>
                         </a:rPr>
-                        <a:t>Recurring license, per-seat/model</a:t>
+                        <a:t>Configurable, but core logic is vendor-owned</a:t>
                       </a:r>
                       <a:endParaRPr lang="en-US" sz="1000" dirty="0">
+                        <a:latin typeface="Calibri" charset="0"/>
+                        <a:ea typeface="Calibri" charset="0"/>
+                        <a:cs typeface="Calibri" charset="0"/>
+                      </a:endParaRPr>
+                    </a:p>
+                  </a:txBody>
+                  <a:tcPr marL="91440" marR="91440" marT="45720" marB="45720" anchor="ctr">
+                    <a:lnL w="9525" cap="flat" cmpd="sng" algn="ctr">
+                      <a:solidFill>
+                        <a:srgbClr val="E3E8EC"/>
+                      </a:solidFill>
+                      <a:prstDash val="solid"/>
+                      <a:round/>
+                      <a:headEnd type="none" w="med" len="med"/>
+                      <a:tailEnd type="none" w="med" len="med"/>
+                    </a:lnL>
+                    <a:lnR w="9525" cap="flat" cmpd="sng" algn="ctr">
+                      <a:solidFill>
+                        <a:srgbClr val="E3E8EC"/>
+                      </a:solidFill>
+                      <a:prstDash val="solid"/>
+                      <a:round/>
+                      <a:headEnd type="none" w="med" len="med"/>
+                      <a:tailEnd type="none" w="med" len="med"/>
+                    </a:lnR>
+                    <a:lnT w="9525" cap="flat" cmpd="sng" algn="ctr">
+                      <a:solidFill>
+                        <a:srgbClr val="E3E8EC"/>
+                      </a:solidFill>
+                      <a:prstDash val="solid"/>
+                      <a:round/>
+                      <a:headEnd type="none" w="med" len="med"/>
+                      <a:tailEnd type="none" w="med" len="med"/>
+                    </a:lnT>
+                    <a:lnB w="9525" cap="flat" cmpd="sng" algn="ctr">
+                      <a:solidFill>
+                        <a:srgbClr val="E3E8EC"/>
+                      </a:solidFill>
+                      <a:prstDash val="solid"/>
+                      <a:round/>
+                      <a:headEnd type="none" w="med" len="med"/>
+                      <a:tailEnd type="none" w="med" len="med"/>
+                    </a:lnB>
+                    <a:solidFill>
+                      <a:srgbClr val="F3F6F8"/>
+                    </a:solidFill>
+                  </a:tcPr>
+                </a:tc>
+                <a:tc>
+                  <a:txBody>
+                    <a:bodyPr/>
+                    <a:lstStyle/>
+                    <a:p>
+                      <a:pPr indent="0" marL="0">
+                        <a:buNone/>
+                      </a:pPr>
+                      <a:r>
+                        <a:rPr lang="en-US" sz="1050" dirty="0">
+                          <a:solidFill>
+                            <a:srgbClr val="FFFFFF"/>
+                          </a:solidFill>
+                          <a:latin typeface="Calibri" pitchFamily="34" charset="0"/>
+                          <a:ea typeface="Calibri" pitchFamily="34" charset="-122"/>
+                          <a:cs typeface="Calibri" pitchFamily="34" charset="-120"/>
+                        </a:rPr>
+                        <a:t>Highest — shaped exactly to the org</a:t>
+                      </a:r>
+                      <a:endParaRPr lang="en-US" sz="1050" dirty="0">
+                        <a:latin typeface="Calibri" charset="0"/>
+                        <a:ea typeface="Calibri" charset="0"/>
+                        <a:cs typeface="Calibri" charset="0"/>
+                      </a:endParaRPr>
+                    </a:p>
+                  </a:txBody>
+                  <a:tcPr marL="91440" marR="91440" marT="45720" marB="45720" anchor="ctr">
+                    <a:lnL w="9525" cap="flat" cmpd="sng" algn="ctr">
+                      <a:solidFill>
+                        <a:srgbClr val="E3E8EC"/>
+                      </a:solidFill>
+                      <a:prstDash val="solid"/>
+                      <a:round/>
+                      <a:headEnd type="none" w="med" len="med"/>
+                      <a:tailEnd type="none" w="med" len="med"/>
+                    </a:lnL>
+                    <a:lnR w="9525" cap="flat" cmpd="sng" algn="ctr">
+                      <a:solidFill>
+                        <a:srgbClr val="E3E8EC"/>
+                      </a:solidFill>
+                      <a:prstDash val="solid"/>
+                      <a:round/>
+                      <a:headEnd type="none" w="med" len="med"/>
+                      <a:tailEnd type="none" w="med" len="med"/>
+                    </a:lnR>
+                    <a:lnT w="9525" cap="flat" cmpd="sng" algn="ctr">
+                      <a:solidFill>
+                        <a:srgbClr val="E3E8EC"/>
+                      </a:solidFill>
+                      <a:prstDash val="solid"/>
+                      <a:round/>
+                      <a:headEnd type="none" w="med" len="med"/>
+                      <a:tailEnd type="none" w="med" len="med"/>
+                    </a:lnT>
+                    <a:lnB w="9525" cap="flat" cmpd="sng" algn="ctr">
+                      <a:solidFill>
+                        <a:srgbClr val="E3E8EC"/>
+                      </a:solidFill>
+                      <a:prstDash val="solid"/>
+                      <a:round/>
+                      <a:headEnd type="none" w="med" len="med"/>
+                      <a:tailEnd type="none" w="med" len="med"/>
+                    </a:lnB>
+                    <a:solidFill>
+                      <a:srgbClr val="0A2A43"/>
+                    </a:solidFill>
+                  </a:tcPr>
+                </a:tc>
+              </a:tr>
+              <a:tr h="685800">
+                <a:tc>
+                  <a:txBody>
+                    <a:bodyPr/>
+                    <a:lstStyle/>
+                    <a:p>
+                      <a:pPr indent="0" marL="0">
+                        <a:buNone/>
+                      </a:pPr>
+                      <a:r>
+                        <a:rPr lang="en-US" sz="1050" b="1" dirty="0">
+                          <a:solidFill>
+                            <a:srgbClr val="0A2A43"/>
+                          </a:solidFill>
+                          <a:latin typeface="Calibri" pitchFamily="34" charset="0"/>
+                          <a:ea typeface="Calibri" pitchFamily="34" charset="-122"/>
+                          <a:cs typeface="Calibri" pitchFamily="34" charset="-120"/>
+                        </a:rPr>
+                        <a:t>Regulatory control</a:t>
+                      </a:r>
+                      <a:endParaRPr lang="en-US" sz="1050" dirty="0">
+                        <a:latin typeface="Calibri" charset="0"/>
+                        <a:ea typeface="Calibri" charset="0"/>
+                        <a:cs typeface="Calibri" charset="0"/>
+                      </a:endParaRPr>
+                    </a:p>
+                  </a:txBody>
+                  <a:tcPr marL="91440" marR="91440" marT="45720" marB="45720" anchor="ctr">
+                    <a:lnL w="9525" cap="flat" cmpd="sng" algn="ctr">
+                      <a:solidFill>
+                        <a:srgbClr val="E3E8EC"/>
+                      </a:solidFill>
+                      <a:prstDash val="solid"/>
+                      <a:round/>
+                      <a:headEnd type="none" w="med" len="med"/>
+                      <a:tailEnd type="none" w="med" len="med"/>
+                    </a:lnL>
+                    <a:lnR w="9525" cap="flat" cmpd="sng" algn="ctr">
+                      <a:solidFill>
+                        <a:srgbClr val="E3E8EC"/>
+                      </a:solidFill>
+                      <a:prstDash val="solid"/>
+                      <a:round/>
+                      <a:headEnd type="none" w="med" len="med"/>
+                      <a:tailEnd type="none" w="med" len="med"/>
+                    </a:lnR>
+                    <a:lnT w="9525" cap="flat" cmpd="sng" algn="ctr">
+                      <a:solidFill>
+                        <a:srgbClr val="E3E8EC"/>
+                      </a:solidFill>
+                      <a:prstDash val="solid"/>
+                      <a:round/>
+                      <a:headEnd type="none" w="med" len="med"/>
+                      <a:tailEnd type="none" w="med" len="med"/>
+                    </a:lnT>
+                    <a:lnB w="9525" cap="flat" cmpd="sng" algn="ctr">
+                      <a:solidFill>
+                        <a:srgbClr val="E3E8EC"/>
+                      </a:solidFill>
+                      <a:prstDash val="solid"/>
+                      <a:round/>
+                      <a:headEnd type="none" w="med" len="med"/>
+                      <a:tailEnd type="none" w="med" len="med"/>
+                    </a:lnB>
+                    <a:solidFill>
+                      <a:srgbClr val="FFFFFF"/>
+                    </a:solidFill>
+                  </a:tcPr>
+                </a:tc>
+                <a:tc>
+                  <a:txBody>
+                    <a:bodyPr/>
+                    <a:lstStyle/>
+                    <a:p>
+                      <a:pPr indent="0" marL="0">
+                        <a:buNone/>
+                      </a:pPr>
+                      <a:r>
+                        <a:rPr lang="en-US" sz="1000" dirty="0">
+                          <a:solidFill>
+                            <a:srgbClr val="6B7280"/>
+                          </a:solidFill>
+                          <a:latin typeface="Calibri" pitchFamily="34" charset="0"/>
+                          <a:ea typeface="Calibri" pitchFamily="34" charset="-122"/>
+                          <a:cs typeface="Calibri" pitchFamily="34" charset="-120"/>
+                        </a:rPr>
+                        <a:t>General-purpose control language</a:t>
+                      </a:r>
+                      <a:endParaRPr lang="en-US" sz="1000" dirty="0">
+                        <a:latin typeface="Calibri" charset="0"/>
+                        <a:ea typeface="Calibri" charset="0"/>
+                        <a:cs typeface="Calibri" charset="0"/>
+                      </a:endParaRPr>
+                    </a:p>
+                  </a:txBody>
+                  <a:tcPr marL="91440" marR="91440" marT="45720" marB="45720" anchor="ctr">
+                    <a:lnL w="9525" cap="flat" cmpd="sng" algn="ctr">
+                      <a:solidFill>
+                        <a:srgbClr val="E3E8EC"/>
+                      </a:solidFill>
+                      <a:prstDash val="solid"/>
+                      <a:round/>
+                      <a:headEnd type="none" w="med" len="med"/>
+                      <a:tailEnd type="none" w="med" len="med"/>
+                    </a:lnL>
+                    <a:lnR w="9525" cap="flat" cmpd="sng" algn="ctr">
+                      <a:solidFill>
+                        <a:srgbClr val="E3E8EC"/>
+                      </a:solidFill>
+                      <a:prstDash val="solid"/>
+                      <a:round/>
+                      <a:headEnd type="none" w="med" len="med"/>
+                      <a:tailEnd type="none" w="med" len="med"/>
+                    </a:lnR>
+                    <a:lnT w="9525" cap="flat" cmpd="sng" algn="ctr">
+                      <a:solidFill>
+                        <a:srgbClr val="E3E8EC"/>
+                      </a:solidFill>
+                      <a:prstDash val="solid"/>
+                      <a:round/>
+                      <a:headEnd type="none" w="med" len="med"/>
+                      <a:tailEnd type="none" w="med" len="med"/>
+                    </a:lnT>
+                    <a:lnB w="9525" cap="flat" cmpd="sng" algn="ctr">
+                      <a:solidFill>
+                        <a:srgbClr val="E3E8EC"/>
+                      </a:solidFill>
+                      <a:prstDash val="solid"/>
+                      <a:round/>
+                      <a:headEnd type="none" w="med" len="med"/>
+                      <a:tailEnd type="none" w="med" len="med"/>
+                    </a:lnB>
+                    <a:solidFill>
+                      <a:srgbClr val="FFFFFF"/>
+                    </a:solidFill>
+                  </a:tcPr>
+                </a:tc>
+                <a:tc>
+                  <a:txBody>
+                    <a:bodyPr/>
+                    <a:lstStyle/>
+                    <a:p>
+                      <a:pPr indent="0" marL="0">
+                        <a:buNone/>
+                      </a:pPr>
+                      <a:r>
+                        <a:rPr lang="en-US" sz="1000" dirty="0">
+                          <a:solidFill>
+                            <a:srgbClr val="6B7280"/>
+                          </a:solidFill>
+                          <a:latin typeface="Calibri" pitchFamily="34" charset="0"/>
+                          <a:ea typeface="Calibri" pitchFamily="34" charset="-122"/>
+                          <a:cs typeface="Calibri" pitchFamily="34" charset="-120"/>
+                        </a:rPr>
+                        <a:t>Compliance-aware, but generic</a:t>
+                      </a:r>
+                      <a:endParaRPr lang="en-US" sz="1000" dirty="0">
+                        <a:latin typeface="Calibri" charset="0"/>
+                        <a:ea typeface="Calibri" charset="0"/>
+                        <a:cs typeface="Calibri" charset="0"/>
+                      </a:endParaRPr>
+                    </a:p>
+                  </a:txBody>
+                  <a:tcPr marL="91440" marR="91440" marT="45720" marB="45720" anchor="ctr">
+                    <a:lnL w="9525" cap="flat" cmpd="sng" algn="ctr">
+                      <a:solidFill>
+                        <a:srgbClr val="E3E8EC"/>
+                      </a:solidFill>
+                      <a:prstDash val="solid"/>
+                      <a:round/>
+                      <a:headEnd type="none" w="med" len="med"/>
+                      <a:tailEnd type="none" w="med" len="med"/>
+                    </a:lnL>
+                    <a:lnR w="9525" cap="flat" cmpd="sng" algn="ctr">
+                      <a:solidFill>
+                        <a:srgbClr val="E3E8EC"/>
+                      </a:solidFill>
+                      <a:prstDash val="solid"/>
+                      <a:round/>
+                      <a:headEnd type="none" w="med" len="med"/>
+                      <a:tailEnd type="none" w="med" len="med"/>
+                    </a:lnR>
+                    <a:lnT w="9525" cap="flat" cmpd="sng" algn="ctr">
+                      <a:solidFill>
+                        <a:srgbClr val="E3E8EC"/>
+                      </a:solidFill>
+                      <a:prstDash val="solid"/>
+                      <a:round/>
+                      <a:headEnd type="none" w="med" len="med"/>
+                      <a:tailEnd type="none" w="med" len="med"/>
+                    </a:lnT>
+                    <a:lnB w="9525" cap="flat" cmpd="sng" algn="ctr">
+                      <a:solidFill>
+                        <a:srgbClr val="E3E8EC"/>
+                      </a:solidFill>
+                      <a:prstDash val="solid"/>
+                      <a:round/>
+                      <a:headEnd type="none" w="med" len="med"/>
+                      <a:tailEnd type="none" w="med" len="med"/>
+                    </a:lnB>
+                    <a:solidFill>
+                      <a:srgbClr val="FFFFFF"/>
+                    </a:solidFill>
+                  </a:tcPr>
+                </a:tc>
+                <a:tc>
+                  <a:txBody>
+                    <a:bodyPr/>
+                    <a:lstStyle/>
+                    <a:p>
+                      <a:pPr indent="0" marL="0">
+                        <a:buNone/>
+                      </a:pPr>
+                      <a:r>
+                        <a:rPr lang="en-US" sz="1050" dirty="0">
+                          <a:solidFill>
+                            <a:srgbClr val="FFFFFF"/>
+                          </a:solidFill>
+                          <a:latin typeface="Calibri" pitchFamily="34" charset="0"/>
+                          <a:ea typeface="Calibri" pitchFamily="34" charset="-122"/>
+                          <a:cs typeface="Calibri" pitchFamily="34" charset="-120"/>
+                        </a:rPr>
+                        <a:t>Highest — maps to specific regulation (roadmap item)</a:t>
+                      </a:r>
+                      <a:endParaRPr lang="en-US" sz="1050" dirty="0">
+                        <a:latin typeface="Calibri" charset="0"/>
+                        <a:ea typeface="Calibri" charset="0"/>
+                        <a:cs typeface="Calibri" charset="0"/>
+                      </a:endParaRPr>
+                    </a:p>
+                  </a:txBody>
+                  <a:tcPr marL="91440" marR="91440" marT="45720" marB="45720" anchor="ctr">
+                    <a:lnL w="9525" cap="flat" cmpd="sng" algn="ctr">
+                      <a:solidFill>
+                        <a:srgbClr val="E3E8EC"/>
+                      </a:solidFill>
+                      <a:prstDash val="solid"/>
+                      <a:round/>
+                      <a:headEnd type="none" w="med" len="med"/>
+                      <a:tailEnd type="none" w="med" len="med"/>
+                    </a:lnL>
+                    <a:lnR w="9525" cap="flat" cmpd="sng" algn="ctr">
+                      <a:solidFill>
+                        <a:srgbClr val="E3E8EC"/>
+                      </a:solidFill>
+                      <a:prstDash val="solid"/>
+                      <a:round/>
+                      <a:headEnd type="none" w="med" len="med"/>
+                      <a:tailEnd type="none" w="med" len="med"/>
+                    </a:lnR>
+                    <a:lnT w="9525" cap="flat" cmpd="sng" algn="ctr">
+                      <a:solidFill>
+                        <a:srgbClr val="E3E8EC"/>
+                      </a:solidFill>
+                      <a:prstDash val="solid"/>
+                      <a:round/>
+                      <a:headEnd type="none" w="med" len="med"/>
+                      <a:tailEnd type="none" w="med" len="med"/>
+                    </a:lnT>
+                    <a:lnB w="9525" cap="flat" cmpd="sng" algn="ctr">
+                      <a:solidFill>
+                        <a:srgbClr val="E3E8EC"/>
+                      </a:solidFill>
+                      <a:prstDash val="solid"/>
+                      <a:round/>
+                      <a:headEnd type="none" w="med" len="med"/>
+                      <a:tailEnd type="none" w="med" len="med"/>
+                    </a:lnB>
+                    <a:solidFill>
+                      <a:srgbClr val="0A2A43"/>
+                    </a:solidFill>
+                  </a:tcPr>
+                </a:tc>
+              </a:tr>
+              <a:tr h="685800">
+                <a:tc>
+                  <a:txBody>
+                    <a:bodyPr/>
+                    <a:lstStyle/>
+                    <a:p>
+                      <a:pPr indent="0" marL="0">
+                        <a:buNone/>
+                      </a:pPr>
+                      <a:r>
+                        <a:rPr lang="en-US" sz="1050" b="1" dirty="0">
+                          <a:solidFill>
+                            <a:srgbClr val="0A2A43"/>
+                          </a:solidFill>
+                          <a:latin typeface="Calibri" pitchFamily="34" charset="0"/>
+                          <a:ea typeface="Calibri" pitchFamily="34" charset="-122"/>
+                          <a:cs typeface="Calibri" pitchFamily="34" charset="-120"/>
+                        </a:rPr>
+                        <a:t>Scalability</a:t>
+                      </a:r>
+                      <a:endParaRPr lang="en-US" sz="1050" dirty="0">
                         <a:latin typeface="Calibri" charset="0"/>
                         <a:ea typeface="Calibri" charset="0"/>
                         <a:cs typeface="Calibri" charset="0"/>
@@ -13219,357 +13345,13 @@
                       <a:r>
                         <a:rPr lang="en-US" sz="1000" dirty="0">
                           <a:solidFill>
-                            <a:srgbClr val="1F2937"/>
+                            <a:srgbClr val="6B7280"/>
                           </a:solidFill>
                           <a:latin typeface="Calibri" pitchFamily="34" charset="0"/>
                           <a:ea typeface="Calibri" pitchFamily="34" charset="-122"/>
                           <a:cs typeface="Calibri" pitchFamily="34" charset="-120"/>
                         </a:rPr>
-                        <a:t>Upfront investment, no license, internal ownership</a:t>
-                      </a:r>
-                      <a:endParaRPr lang="en-US" sz="1000" dirty="0">
-                        <a:latin typeface="Calibri" charset="0"/>
-                        <a:ea typeface="Calibri" charset="0"/>
-                        <a:cs typeface="Calibri" charset="0"/>
-                      </a:endParaRPr>
-                    </a:p>
-                  </a:txBody>
-                  <a:tcPr marL="91440" marR="91440" marT="45720" marB="45720" anchor="ctr">
-                    <a:lnL w="9525" cap="flat" cmpd="sng" algn="ctr">
-                      <a:solidFill>
-                        <a:srgbClr val="E3E8EC"/>
-                      </a:solidFill>
-                      <a:prstDash val="solid"/>
-                      <a:round/>
-                      <a:headEnd type="none" w="med" len="med"/>
-                      <a:tailEnd type="none" w="med" len="med"/>
-                    </a:lnL>
-                    <a:lnR w="9525" cap="flat" cmpd="sng" algn="ctr">
-                      <a:solidFill>
-                        <a:srgbClr val="E3E8EC"/>
-                      </a:solidFill>
-                      <a:prstDash val="solid"/>
-                      <a:round/>
-                      <a:headEnd type="none" w="med" len="med"/>
-                      <a:tailEnd type="none" w="med" len="med"/>
-                    </a:lnR>
-                    <a:lnT w="9525" cap="flat" cmpd="sng" algn="ctr">
-                      <a:solidFill>
-                        <a:srgbClr val="E3E8EC"/>
-                      </a:solidFill>
-                      <a:prstDash val="solid"/>
-                      <a:round/>
-                      <a:headEnd type="none" w="med" len="med"/>
-                      <a:tailEnd type="none" w="med" len="med"/>
-                    </a:lnT>
-                    <a:lnB w="9525" cap="flat" cmpd="sng" algn="ctr">
-                      <a:solidFill>
-                        <a:srgbClr val="E3E8EC"/>
-                      </a:solidFill>
-                      <a:prstDash val="solid"/>
-                      <a:round/>
-                      <a:headEnd type="none" w="med" len="med"/>
-                      <a:tailEnd type="none" w="med" len="med"/>
-                    </a:lnB>
-                    <a:solidFill>
-                      <a:srgbClr val="F3F6F8"/>
-                    </a:solidFill>
-                  </a:tcPr>
-                </a:tc>
-              </a:tr>
-              <a:tr h="822960">
-                <a:tc>
-                  <a:txBody>
-                    <a:bodyPr/>
-                    <a:lstStyle/>
-                    <a:p>
-                      <a:pPr indent="0" marL="0">
-                        <a:buNone/>
-                      </a:pPr>
-                      <a:r>
-                        <a:rPr lang="en-US" sz="1000" b="1" dirty="0">
-                          <a:solidFill>
-                            <a:srgbClr val="1F2937"/>
-                          </a:solidFill>
-                          <a:latin typeface="Calibri" pitchFamily="34" charset="0"/>
-                          <a:ea typeface="Calibri" pitchFamily="34" charset="-122"/>
-                          <a:cs typeface="Calibri" pitchFamily="34" charset="-120"/>
-                        </a:rPr>
-                        <a:t>Integration complexity</a:t>
-                      </a:r>
-                      <a:endParaRPr lang="en-US" sz="1000" dirty="0">
-                        <a:latin typeface="Calibri" charset="0"/>
-                        <a:ea typeface="Calibri" charset="0"/>
-                        <a:cs typeface="Calibri" charset="0"/>
-                      </a:endParaRPr>
-                    </a:p>
-                  </a:txBody>
-                  <a:tcPr marL="91440" marR="91440" marT="45720" marB="45720" anchor="ctr">
-                    <a:lnL w="9525" cap="flat" cmpd="sng" algn="ctr">
-                      <a:solidFill>
-                        <a:srgbClr val="E3E8EC"/>
-                      </a:solidFill>
-                      <a:prstDash val="solid"/>
-                      <a:round/>
-                      <a:headEnd type="none" w="med" len="med"/>
-                      <a:tailEnd type="none" w="med" len="med"/>
-                    </a:lnL>
-                    <a:lnR w="9525" cap="flat" cmpd="sng" algn="ctr">
-                      <a:solidFill>
-                        <a:srgbClr val="E3E8EC"/>
-                      </a:solidFill>
-                      <a:prstDash val="solid"/>
-                      <a:round/>
-                      <a:headEnd type="none" w="med" len="med"/>
-                      <a:tailEnd type="none" w="med" len="med"/>
-                    </a:lnR>
-                    <a:lnT w="9525" cap="flat" cmpd="sng" algn="ctr">
-                      <a:solidFill>
-                        <a:srgbClr val="E3E8EC"/>
-                      </a:solidFill>
-                      <a:prstDash val="solid"/>
-                      <a:round/>
-                      <a:headEnd type="none" w="med" len="med"/>
-                      <a:tailEnd type="none" w="med" len="med"/>
-                    </a:lnT>
-                    <a:lnB w="9525" cap="flat" cmpd="sng" algn="ctr">
-                      <a:solidFill>
-                        <a:srgbClr val="E3E8EC"/>
-                      </a:solidFill>
-                      <a:prstDash val="solid"/>
-                      <a:round/>
-                      <a:headEnd type="none" w="med" len="med"/>
-                      <a:tailEnd type="none" w="med" len="med"/>
-                    </a:lnB>
-                    <a:solidFill>
-                      <a:srgbClr val="FFFFFF"/>
-                    </a:solidFill>
-                  </a:tcPr>
-                </a:tc>
-                <a:tc>
-                  <a:txBody>
-                    <a:bodyPr/>
-                    <a:lstStyle/>
-                    <a:p>
-                      <a:pPr indent="0" marL="0">
-                        <a:buNone/>
-                      </a:pPr>
-                      <a:r>
-                        <a:rPr lang="en-US" sz="1000" dirty="0">
-                          <a:solidFill>
-                            <a:srgbClr val="1F2937"/>
-                          </a:solidFill>
-                          <a:latin typeface="Calibri" pitchFamily="34" charset="0"/>
-                          <a:ea typeface="Calibri" pitchFamily="34" charset="-122"/>
-                          <a:cs typeface="Calibri" pitchFamily="34" charset="-120"/>
-                        </a:rPr>
-                        <a:t>Low, but AI runtime concepts aren't native</a:t>
-                      </a:r>
-                      <a:endParaRPr lang="en-US" sz="1000" dirty="0">
-                        <a:latin typeface="Calibri" charset="0"/>
-                        <a:ea typeface="Calibri" charset="0"/>
-                        <a:cs typeface="Calibri" charset="0"/>
-                      </a:endParaRPr>
-                    </a:p>
-                  </a:txBody>
-                  <a:tcPr marL="91440" marR="91440" marT="45720" marB="45720" anchor="ctr">
-                    <a:lnL w="9525" cap="flat" cmpd="sng" algn="ctr">
-                      <a:solidFill>
-                        <a:srgbClr val="E3E8EC"/>
-                      </a:solidFill>
-                      <a:prstDash val="solid"/>
-                      <a:round/>
-                      <a:headEnd type="none" w="med" len="med"/>
-                      <a:tailEnd type="none" w="med" len="med"/>
-                    </a:lnL>
-                    <a:lnR w="9525" cap="flat" cmpd="sng" algn="ctr">
-                      <a:solidFill>
-                        <a:srgbClr val="E3E8EC"/>
-                      </a:solidFill>
-                      <a:prstDash val="solid"/>
-                      <a:round/>
-                      <a:headEnd type="none" w="med" len="med"/>
-                      <a:tailEnd type="none" w="med" len="med"/>
-                    </a:lnR>
-                    <a:lnT w="9525" cap="flat" cmpd="sng" algn="ctr">
-                      <a:solidFill>
-                        <a:srgbClr val="E3E8EC"/>
-                      </a:solidFill>
-                      <a:prstDash val="solid"/>
-                      <a:round/>
-                      <a:headEnd type="none" w="med" len="med"/>
-                      <a:tailEnd type="none" w="med" len="med"/>
-                    </a:lnT>
-                    <a:lnB w="9525" cap="flat" cmpd="sng" algn="ctr">
-                      <a:solidFill>
-                        <a:srgbClr val="E3E8EC"/>
-                      </a:solidFill>
-                      <a:prstDash val="solid"/>
-                      <a:round/>
-                      <a:headEnd type="none" w="med" len="med"/>
-                      <a:tailEnd type="none" w="med" len="med"/>
-                    </a:lnB>
-                    <a:solidFill>
-                      <a:srgbClr val="FFFFFF"/>
-                    </a:solidFill>
-                  </a:tcPr>
-                </a:tc>
-                <a:tc>
-                  <a:txBody>
-                    <a:bodyPr/>
-                    <a:lstStyle/>
-                    <a:p>
-                      <a:pPr indent="0" marL="0">
-                        <a:buNone/>
-                      </a:pPr>
-                      <a:r>
-                        <a:rPr lang="en-US" sz="1000" dirty="0">
-                          <a:solidFill>
-                            <a:srgbClr val="1F2937"/>
-                          </a:solidFill>
-                          <a:latin typeface="Calibri" pitchFamily="34" charset="0"/>
-                          <a:ea typeface="Calibri" pitchFamily="34" charset="-122"/>
-                          <a:cs typeface="Calibri" pitchFamily="34" charset="-120"/>
-                        </a:rPr>
-                        <a:t>Medium-high — vendor didn't design for our Gateway</a:t>
-                      </a:r>
-                      <a:endParaRPr lang="en-US" sz="1000" dirty="0">
-                        <a:latin typeface="Calibri" charset="0"/>
-                        <a:ea typeface="Calibri" charset="0"/>
-                        <a:cs typeface="Calibri" charset="0"/>
-                      </a:endParaRPr>
-                    </a:p>
-                  </a:txBody>
-                  <a:tcPr marL="91440" marR="91440" marT="45720" marB="45720" anchor="ctr">
-                    <a:lnL w="9525" cap="flat" cmpd="sng" algn="ctr">
-                      <a:solidFill>
-                        <a:srgbClr val="E3E8EC"/>
-                      </a:solidFill>
-                      <a:prstDash val="solid"/>
-                      <a:round/>
-                      <a:headEnd type="none" w="med" len="med"/>
-                      <a:tailEnd type="none" w="med" len="med"/>
-                    </a:lnL>
-                    <a:lnR w="9525" cap="flat" cmpd="sng" algn="ctr">
-                      <a:solidFill>
-                        <a:srgbClr val="E3E8EC"/>
-                      </a:solidFill>
-                      <a:prstDash val="solid"/>
-                      <a:round/>
-                      <a:headEnd type="none" w="med" len="med"/>
-                      <a:tailEnd type="none" w="med" len="med"/>
-                    </a:lnR>
-                    <a:lnT w="9525" cap="flat" cmpd="sng" algn="ctr">
-                      <a:solidFill>
-                        <a:srgbClr val="E3E8EC"/>
-                      </a:solidFill>
-                      <a:prstDash val="solid"/>
-                      <a:round/>
-                      <a:headEnd type="none" w="med" len="med"/>
-                      <a:tailEnd type="none" w="med" len="med"/>
-                    </a:lnT>
-                    <a:lnB w="9525" cap="flat" cmpd="sng" algn="ctr">
-                      <a:solidFill>
-                        <a:srgbClr val="E3E8EC"/>
-                      </a:solidFill>
-                      <a:prstDash val="solid"/>
-                      <a:round/>
-                      <a:headEnd type="none" w="med" len="med"/>
-                      <a:tailEnd type="none" w="med" len="med"/>
-                    </a:lnB>
-                    <a:solidFill>
-                      <a:srgbClr val="FFFFFF"/>
-                    </a:solidFill>
-                  </a:tcPr>
-                </a:tc>
-                <a:tc>
-                  <a:txBody>
-                    <a:bodyPr/>
-                    <a:lstStyle/>
-                    <a:p>
-                      <a:pPr indent="0" marL="0">
-                        <a:buNone/>
-                      </a:pPr>
-                      <a:r>
-                        <a:rPr lang="en-US" sz="1000" dirty="0">
-                          <a:solidFill>
-                            <a:srgbClr val="1F2937"/>
-                          </a:solidFill>
-                          <a:latin typeface="Calibri" pitchFamily="34" charset="0"/>
-                          <a:ea typeface="Calibri" pitchFamily="34" charset="-122"/>
-                          <a:cs typeface="Calibri" pitchFamily="34" charset="-120"/>
-                        </a:rPr>
-                        <a:t>Low, by construction — built around our own stack</a:t>
-                      </a:r>
-                      <a:endParaRPr lang="en-US" sz="1000" dirty="0">
-                        <a:latin typeface="Calibri" charset="0"/>
-                        <a:ea typeface="Calibri" charset="0"/>
-                        <a:cs typeface="Calibri" charset="0"/>
-                      </a:endParaRPr>
-                    </a:p>
-                  </a:txBody>
-                  <a:tcPr marL="91440" marR="91440" marT="45720" marB="45720" anchor="ctr">
-                    <a:lnL w="9525" cap="flat" cmpd="sng" algn="ctr">
-                      <a:solidFill>
-                        <a:srgbClr val="E3E8EC"/>
-                      </a:solidFill>
-                      <a:prstDash val="solid"/>
-                      <a:round/>
-                      <a:headEnd type="none" w="med" len="med"/>
-                      <a:tailEnd type="none" w="med" len="med"/>
-                    </a:lnL>
-                    <a:lnR w="9525" cap="flat" cmpd="sng" algn="ctr">
-                      <a:solidFill>
-                        <a:srgbClr val="E3E8EC"/>
-                      </a:solidFill>
-                      <a:prstDash val="solid"/>
-                      <a:round/>
-                      <a:headEnd type="none" w="med" len="med"/>
-                      <a:tailEnd type="none" w="med" len="med"/>
-                    </a:lnR>
-                    <a:lnT w="9525" cap="flat" cmpd="sng" algn="ctr">
-                      <a:solidFill>
-                        <a:srgbClr val="E3E8EC"/>
-                      </a:solidFill>
-                      <a:prstDash val="solid"/>
-                      <a:round/>
-                      <a:headEnd type="none" w="med" len="med"/>
-                      <a:tailEnd type="none" w="med" len="med"/>
-                    </a:lnT>
-                    <a:lnB w="9525" cap="flat" cmpd="sng" algn="ctr">
-                      <a:solidFill>
-                        <a:srgbClr val="E3E8EC"/>
-                      </a:solidFill>
-                      <a:prstDash val="solid"/>
-                      <a:round/>
-                      <a:headEnd type="none" w="med" len="med"/>
-                      <a:tailEnd type="none" w="med" len="med"/>
-                    </a:lnB>
-                    <a:solidFill>
-                      <a:srgbClr val="FFFFFF"/>
-                    </a:solidFill>
-                  </a:tcPr>
-                </a:tc>
-              </a:tr>
-              <a:tr h="822960">
-                <a:tc>
-                  <a:txBody>
-                    <a:bodyPr/>
-                    <a:lstStyle/>
-                    <a:p>
-                      <a:pPr indent="0" marL="0">
-                        <a:buNone/>
-                      </a:pPr>
-                      <a:r>
-                        <a:rPr lang="en-US" sz="1000" b="1" dirty="0">
-                          <a:solidFill>
-                            <a:srgbClr val="1F2937"/>
-                          </a:solidFill>
-                          <a:latin typeface="Calibri" pitchFamily="34" charset="0"/>
-                          <a:ea typeface="Calibri" pitchFamily="34" charset="-122"/>
-                          <a:cs typeface="Calibri" pitchFamily="34" charset="-120"/>
-                        </a:rPr>
-                        <a:t>Flexibility</a:t>
+                        <a:t>Not built for real-time runtime supervision</a:t>
                       </a:r>
                       <a:endParaRPr lang="en-US" sz="1000" dirty="0">
                         <a:latin typeface="Calibri" charset="0"/>
@@ -13631,623 +13413,7 @@
                       <a:r>
                         <a:rPr lang="en-US" sz="1000" dirty="0">
                           <a:solidFill>
-                            <a:srgbClr val="1F2937"/>
-                          </a:solidFill>
-                          <a:latin typeface="Calibri" pitchFamily="34" charset="0"/>
-                          <a:ea typeface="Calibri" pitchFamily="34" charset="-122"/>
-                          <a:cs typeface="Calibri" pitchFamily="34" charset="-120"/>
-                        </a:rPr>
-                        <a:t>Constrained to the host platform</a:t>
-                      </a:r>
-                      <a:endParaRPr lang="en-US" sz="1000" dirty="0">
-                        <a:latin typeface="Calibri" charset="0"/>
-                        <a:ea typeface="Calibri" charset="0"/>
-                        <a:cs typeface="Calibri" charset="0"/>
-                      </a:endParaRPr>
-                    </a:p>
-                  </a:txBody>
-                  <a:tcPr marL="91440" marR="91440" marT="45720" marB="45720" anchor="ctr">
-                    <a:lnL w="9525" cap="flat" cmpd="sng" algn="ctr">
-                      <a:solidFill>
-                        <a:srgbClr val="E3E8EC"/>
-                      </a:solidFill>
-                      <a:prstDash val="solid"/>
-                      <a:round/>
-                      <a:headEnd type="none" w="med" len="med"/>
-                      <a:tailEnd type="none" w="med" len="med"/>
-                    </a:lnL>
-                    <a:lnR w="9525" cap="flat" cmpd="sng" algn="ctr">
-                      <a:solidFill>
-                        <a:srgbClr val="E3E8EC"/>
-                      </a:solidFill>
-                      <a:prstDash val="solid"/>
-                      <a:round/>
-                      <a:headEnd type="none" w="med" len="med"/>
-                      <a:tailEnd type="none" w="med" len="med"/>
-                    </a:lnR>
-                    <a:lnT w="9525" cap="flat" cmpd="sng" algn="ctr">
-                      <a:solidFill>
-                        <a:srgbClr val="E3E8EC"/>
-                      </a:solidFill>
-                      <a:prstDash val="solid"/>
-                      <a:round/>
-                      <a:headEnd type="none" w="med" len="med"/>
-                      <a:tailEnd type="none" w="med" len="med"/>
-                    </a:lnT>
-                    <a:lnB w="9525" cap="flat" cmpd="sng" algn="ctr">
-                      <a:solidFill>
-                        <a:srgbClr val="E3E8EC"/>
-                      </a:solidFill>
-                      <a:prstDash val="solid"/>
-                      <a:round/>
-                      <a:headEnd type="none" w="med" len="med"/>
-                      <a:tailEnd type="none" w="med" len="med"/>
-                    </a:lnB>
-                    <a:solidFill>
-                      <a:srgbClr val="F3F6F8"/>
-                    </a:solidFill>
-                  </a:tcPr>
-                </a:tc>
-                <a:tc>
-                  <a:txBody>
-                    <a:bodyPr/>
-                    <a:lstStyle/>
-                    <a:p>
-                      <a:pPr indent="0" marL="0">
-                        <a:buNone/>
-                      </a:pPr>
-                      <a:r>
-                        <a:rPr lang="en-US" sz="1000" dirty="0">
-                          <a:solidFill>
-                            <a:srgbClr val="1F2937"/>
-                          </a:solidFill>
-                          <a:latin typeface="Calibri" pitchFamily="34" charset="0"/>
-                          <a:ea typeface="Calibri" pitchFamily="34" charset="-122"/>
-                          <a:cs typeface="Calibri" pitchFamily="34" charset="-120"/>
-                        </a:rPr>
-                        <a:t>Configurable, but core logic is vendor-owned</a:t>
-                      </a:r>
-                      <a:endParaRPr lang="en-US" sz="1000" dirty="0">
-                        <a:latin typeface="Calibri" charset="0"/>
-                        <a:ea typeface="Calibri" charset="0"/>
-                        <a:cs typeface="Calibri" charset="0"/>
-                      </a:endParaRPr>
-                    </a:p>
-                  </a:txBody>
-                  <a:tcPr marL="91440" marR="91440" marT="45720" marB="45720" anchor="ctr">
-                    <a:lnL w="9525" cap="flat" cmpd="sng" algn="ctr">
-                      <a:solidFill>
-                        <a:srgbClr val="E3E8EC"/>
-                      </a:solidFill>
-                      <a:prstDash val="solid"/>
-                      <a:round/>
-                      <a:headEnd type="none" w="med" len="med"/>
-                      <a:tailEnd type="none" w="med" len="med"/>
-                    </a:lnL>
-                    <a:lnR w="9525" cap="flat" cmpd="sng" algn="ctr">
-                      <a:solidFill>
-                        <a:srgbClr val="E3E8EC"/>
-                      </a:solidFill>
-                      <a:prstDash val="solid"/>
-                      <a:round/>
-                      <a:headEnd type="none" w="med" len="med"/>
-                      <a:tailEnd type="none" w="med" len="med"/>
-                    </a:lnR>
-                    <a:lnT w="9525" cap="flat" cmpd="sng" algn="ctr">
-                      <a:solidFill>
-                        <a:srgbClr val="E3E8EC"/>
-                      </a:solidFill>
-                      <a:prstDash val="solid"/>
-                      <a:round/>
-                      <a:headEnd type="none" w="med" len="med"/>
-                      <a:tailEnd type="none" w="med" len="med"/>
-                    </a:lnT>
-                    <a:lnB w="9525" cap="flat" cmpd="sng" algn="ctr">
-                      <a:solidFill>
-                        <a:srgbClr val="E3E8EC"/>
-                      </a:solidFill>
-                      <a:prstDash val="solid"/>
-                      <a:round/>
-                      <a:headEnd type="none" w="med" len="med"/>
-                      <a:tailEnd type="none" w="med" len="med"/>
-                    </a:lnB>
-                    <a:solidFill>
-                      <a:srgbClr val="F3F6F8"/>
-                    </a:solidFill>
-                  </a:tcPr>
-                </a:tc>
-                <a:tc>
-                  <a:txBody>
-                    <a:bodyPr/>
-                    <a:lstStyle/>
-                    <a:p>
-                      <a:pPr indent="0" marL="0">
-                        <a:buNone/>
-                      </a:pPr>
-                      <a:r>
-                        <a:rPr lang="en-US" sz="1000" dirty="0">
-                          <a:solidFill>
-                            <a:srgbClr val="1F2937"/>
-                          </a:solidFill>
-                          <a:latin typeface="Calibri" pitchFamily="34" charset="0"/>
-                          <a:ea typeface="Calibri" pitchFamily="34" charset="-122"/>
-                          <a:cs typeface="Calibri" pitchFamily="34" charset="-120"/>
-                        </a:rPr>
-                        <a:t>Highest — shaped exactly to the org</a:t>
-                      </a:r>
-                      <a:endParaRPr lang="en-US" sz="1000" dirty="0">
-                        <a:latin typeface="Calibri" charset="0"/>
-                        <a:ea typeface="Calibri" charset="0"/>
-                        <a:cs typeface="Calibri" charset="0"/>
-                      </a:endParaRPr>
-                    </a:p>
-                  </a:txBody>
-                  <a:tcPr marL="91440" marR="91440" marT="45720" marB="45720" anchor="ctr">
-                    <a:lnL w="9525" cap="flat" cmpd="sng" algn="ctr">
-                      <a:solidFill>
-                        <a:srgbClr val="E3E8EC"/>
-                      </a:solidFill>
-                      <a:prstDash val="solid"/>
-                      <a:round/>
-                      <a:headEnd type="none" w="med" len="med"/>
-                      <a:tailEnd type="none" w="med" len="med"/>
-                    </a:lnL>
-                    <a:lnR w="9525" cap="flat" cmpd="sng" algn="ctr">
-                      <a:solidFill>
-                        <a:srgbClr val="E3E8EC"/>
-                      </a:solidFill>
-                      <a:prstDash val="solid"/>
-                      <a:round/>
-                      <a:headEnd type="none" w="med" len="med"/>
-                      <a:tailEnd type="none" w="med" len="med"/>
-                    </a:lnR>
-                    <a:lnT w="9525" cap="flat" cmpd="sng" algn="ctr">
-                      <a:solidFill>
-                        <a:srgbClr val="E3E8EC"/>
-                      </a:solidFill>
-                      <a:prstDash val="solid"/>
-                      <a:round/>
-                      <a:headEnd type="none" w="med" len="med"/>
-                      <a:tailEnd type="none" w="med" len="med"/>
-                    </a:lnT>
-                    <a:lnB w="9525" cap="flat" cmpd="sng" algn="ctr">
-                      <a:solidFill>
-                        <a:srgbClr val="E3E8EC"/>
-                      </a:solidFill>
-                      <a:prstDash val="solid"/>
-                      <a:round/>
-                      <a:headEnd type="none" w="med" len="med"/>
-                      <a:tailEnd type="none" w="med" len="med"/>
-                    </a:lnB>
-                    <a:solidFill>
-                      <a:srgbClr val="F3F6F8"/>
-                    </a:solidFill>
-                  </a:tcPr>
-                </a:tc>
-              </a:tr>
-              <a:tr h="822960">
-                <a:tc>
-                  <a:txBody>
-                    <a:bodyPr/>
-                    <a:lstStyle/>
-                    <a:p>
-                      <a:pPr indent="0" marL="0">
-                        <a:buNone/>
-                      </a:pPr>
-                      <a:r>
-                        <a:rPr lang="en-US" sz="1000" b="1" dirty="0">
-                          <a:solidFill>
-                            <a:srgbClr val="1F2937"/>
-                          </a:solidFill>
-                          <a:latin typeface="Calibri" pitchFamily="34" charset="0"/>
-                          <a:ea typeface="Calibri" pitchFamily="34" charset="-122"/>
-                          <a:cs typeface="Calibri" pitchFamily="34" charset="-120"/>
-                        </a:rPr>
-                        <a:t>Regulatory control</a:t>
-                      </a:r>
-                      <a:endParaRPr lang="en-US" sz="1000" dirty="0">
-                        <a:latin typeface="Calibri" charset="0"/>
-                        <a:ea typeface="Calibri" charset="0"/>
-                        <a:cs typeface="Calibri" charset="0"/>
-                      </a:endParaRPr>
-                    </a:p>
-                  </a:txBody>
-                  <a:tcPr marL="91440" marR="91440" marT="45720" marB="45720" anchor="ctr">
-                    <a:lnL w="9525" cap="flat" cmpd="sng" algn="ctr">
-                      <a:solidFill>
-                        <a:srgbClr val="E3E8EC"/>
-                      </a:solidFill>
-                      <a:prstDash val="solid"/>
-                      <a:round/>
-                      <a:headEnd type="none" w="med" len="med"/>
-                      <a:tailEnd type="none" w="med" len="med"/>
-                    </a:lnL>
-                    <a:lnR w="9525" cap="flat" cmpd="sng" algn="ctr">
-                      <a:solidFill>
-                        <a:srgbClr val="E3E8EC"/>
-                      </a:solidFill>
-                      <a:prstDash val="solid"/>
-                      <a:round/>
-                      <a:headEnd type="none" w="med" len="med"/>
-                      <a:tailEnd type="none" w="med" len="med"/>
-                    </a:lnR>
-                    <a:lnT w="9525" cap="flat" cmpd="sng" algn="ctr">
-                      <a:solidFill>
-                        <a:srgbClr val="E3E8EC"/>
-                      </a:solidFill>
-                      <a:prstDash val="solid"/>
-                      <a:round/>
-                      <a:headEnd type="none" w="med" len="med"/>
-                      <a:tailEnd type="none" w="med" len="med"/>
-                    </a:lnT>
-                    <a:lnB w="9525" cap="flat" cmpd="sng" algn="ctr">
-                      <a:solidFill>
-                        <a:srgbClr val="E3E8EC"/>
-                      </a:solidFill>
-                      <a:prstDash val="solid"/>
-                      <a:round/>
-                      <a:headEnd type="none" w="med" len="med"/>
-                      <a:tailEnd type="none" w="med" len="med"/>
-                    </a:lnB>
-                    <a:solidFill>
-                      <a:srgbClr val="FFFFFF"/>
-                    </a:solidFill>
-                  </a:tcPr>
-                </a:tc>
-                <a:tc>
-                  <a:txBody>
-                    <a:bodyPr/>
-                    <a:lstStyle/>
-                    <a:p>
-                      <a:pPr indent="0" marL="0">
-                        <a:buNone/>
-                      </a:pPr>
-                      <a:r>
-                        <a:rPr lang="en-US" sz="1000" dirty="0">
-                          <a:solidFill>
-                            <a:srgbClr val="1F2937"/>
-                          </a:solidFill>
-                          <a:latin typeface="Calibri" pitchFamily="34" charset="0"/>
-                          <a:ea typeface="Calibri" pitchFamily="34" charset="-122"/>
-                          <a:cs typeface="Calibri" pitchFamily="34" charset="-120"/>
-                        </a:rPr>
-                        <a:t>General-purpose control language</a:t>
-                      </a:r>
-                      <a:endParaRPr lang="en-US" sz="1000" dirty="0">
-                        <a:latin typeface="Calibri" charset="0"/>
-                        <a:ea typeface="Calibri" charset="0"/>
-                        <a:cs typeface="Calibri" charset="0"/>
-                      </a:endParaRPr>
-                    </a:p>
-                  </a:txBody>
-                  <a:tcPr marL="91440" marR="91440" marT="45720" marB="45720" anchor="ctr">
-                    <a:lnL w="9525" cap="flat" cmpd="sng" algn="ctr">
-                      <a:solidFill>
-                        <a:srgbClr val="E3E8EC"/>
-                      </a:solidFill>
-                      <a:prstDash val="solid"/>
-                      <a:round/>
-                      <a:headEnd type="none" w="med" len="med"/>
-                      <a:tailEnd type="none" w="med" len="med"/>
-                    </a:lnL>
-                    <a:lnR w="9525" cap="flat" cmpd="sng" algn="ctr">
-                      <a:solidFill>
-                        <a:srgbClr val="E3E8EC"/>
-                      </a:solidFill>
-                      <a:prstDash val="solid"/>
-                      <a:round/>
-                      <a:headEnd type="none" w="med" len="med"/>
-                      <a:tailEnd type="none" w="med" len="med"/>
-                    </a:lnR>
-                    <a:lnT w="9525" cap="flat" cmpd="sng" algn="ctr">
-                      <a:solidFill>
-                        <a:srgbClr val="E3E8EC"/>
-                      </a:solidFill>
-                      <a:prstDash val="solid"/>
-                      <a:round/>
-                      <a:headEnd type="none" w="med" len="med"/>
-                      <a:tailEnd type="none" w="med" len="med"/>
-                    </a:lnT>
-                    <a:lnB w="9525" cap="flat" cmpd="sng" algn="ctr">
-                      <a:solidFill>
-                        <a:srgbClr val="E3E8EC"/>
-                      </a:solidFill>
-                      <a:prstDash val="solid"/>
-                      <a:round/>
-                      <a:headEnd type="none" w="med" len="med"/>
-                      <a:tailEnd type="none" w="med" len="med"/>
-                    </a:lnB>
-                    <a:solidFill>
-                      <a:srgbClr val="FFFFFF"/>
-                    </a:solidFill>
-                  </a:tcPr>
-                </a:tc>
-                <a:tc>
-                  <a:txBody>
-                    <a:bodyPr/>
-                    <a:lstStyle/>
-                    <a:p>
-                      <a:pPr indent="0" marL="0">
-                        <a:buNone/>
-                      </a:pPr>
-                      <a:r>
-                        <a:rPr lang="en-US" sz="1000" dirty="0">
-                          <a:solidFill>
-                            <a:srgbClr val="1F2937"/>
-                          </a:solidFill>
-                          <a:latin typeface="Calibri" pitchFamily="34" charset="0"/>
-                          <a:ea typeface="Calibri" pitchFamily="34" charset="-122"/>
-                          <a:cs typeface="Calibri" pitchFamily="34" charset="-120"/>
-                        </a:rPr>
-                        <a:t>Compliance-aware, but generic</a:t>
-                      </a:r>
-                      <a:endParaRPr lang="en-US" sz="1000" dirty="0">
-                        <a:latin typeface="Calibri" charset="0"/>
-                        <a:ea typeface="Calibri" charset="0"/>
-                        <a:cs typeface="Calibri" charset="0"/>
-                      </a:endParaRPr>
-                    </a:p>
-                  </a:txBody>
-                  <a:tcPr marL="91440" marR="91440" marT="45720" marB="45720" anchor="ctr">
-                    <a:lnL w="9525" cap="flat" cmpd="sng" algn="ctr">
-                      <a:solidFill>
-                        <a:srgbClr val="E3E8EC"/>
-                      </a:solidFill>
-                      <a:prstDash val="solid"/>
-                      <a:round/>
-                      <a:headEnd type="none" w="med" len="med"/>
-                      <a:tailEnd type="none" w="med" len="med"/>
-                    </a:lnL>
-                    <a:lnR w="9525" cap="flat" cmpd="sng" algn="ctr">
-                      <a:solidFill>
-                        <a:srgbClr val="E3E8EC"/>
-                      </a:solidFill>
-                      <a:prstDash val="solid"/>
-                      <a:round/>
-                      <a:headEnd type="none" w="med" len="med"/>
-                      <a:tailEnd type="none" w="med" len="med"/>
-                    </a:lnR>
-                    <a:lnT w="9525" cap="flat" cmpd="sng" algn="ctr">
-                      <a:solidFill>
-                        <a:srgbClr val="E3E8EC"/>
-                      </a:solidFill>
-                      <a:prstDash val="solid"/>
-                      <a:round/>
-                      <a:headEnd type="none" w="med" len="med"/>
-                      <a:tailEnd type="none" w="med" len="med"/>
-                    </a:lnT>
-                    <a:lnB w="9525" cap="flat" cmpd="sng" algn="ctr">
-                      <a:solidFill>
-                        <a:srgbClr val="E3E8EC"/>
-                      </a:solidFill>
-                      <a:prstDash val="solid"/>
-                      <a:round/>
-                      <a:headEnd type="none" w="med" len="med"/>
-                      <a:tailEnd type="none" w="med" len="med"/>
-                    </a:lnB>
-                    <a:solidFill>
-                      <a:srgbClr val="FFFFFF"/>
-                    </a:solidFill>
-                  </a:tcPr>
-                </a:tc>
-                <a:tc>
-                  <a:txBody>
-                    <a:bodyPr/>
-                    <a:lstStyle/>
-                    <a:p>
-                      <a:pPr indent="0" marL="0">
-                        <a:buNone/>
-                      </a:pPr>
-                      <a:r>
-                        <a:rPr lang="en-US" sz="1000" dirty="0">
-                          <a:solidFill>
-                            <a:srgbClr val="1F2937"/>
-                          </a:solidFill>
-                          <a:latin typeface="Calibri" pitchFamily="34" charset="0"/>
-                          <a:ea typeface="Calibri" pitchFamily="34" charset="-122"/>
-                          <a:cs typeface="Calibri" pitchFamily="34" charset="-120"/>
-                        </a:rPr>
-                        <a:t>Highest — maps to specific regulation (roadmap item)</a:t>
-                      </a:r>
-                      <a:endParaRPr lang="en-US" sz="1000" dirty="0">
-                        <a:latin typeface="Calibri" charset="0"/>
-                        <a:ea typeface="Calibri" charset="0"/>
-                        <a:cs typeface="Calibri" charset="0"/>
-                      </a:endParaRPr>
-                    </a:p>
-                  </a:txBody>
-                  <a:tcPr marL="91440" marR="91440" marT="45720" marB="45720" anchor="ctr">
-                    <a:lnL w="9525" cap="flat" cmpd="sng" algn="ctr">
-                      <a:solidFill>
-                        <a:srgbClr val="E3E8EC"/>
-                      </a:solidFill>
-                      <a:prstDash val="solid"/>
-                      <a:round/>
-                      <a:headEnd type="none" w="med" len="med"/>
-                      <a:tailEnd type="none" w="med" len="med"/>
-                    </a:lnL>
-                    <a:lnR w="9525" cap="flat" cmpd="sng" algn="ctr">
-                      <a:solidFill>
-                        <a:srgbClr val="E3E8EC"/>
-                      </a:solidFill>
-                      <a:prstDash val="solid"/>
-                      <a:round/>
-                      <a:headEnd type="none" w="med" len="med"/>
-                      <a:tailEnd type="none" w="med" len="med"/>
-                    </a:lnR>
-                    <a:lnT w="9525" cap="flat" cmpd="sng" algn="ctr">
-                      <a:solidFill>
-                        <a:srgbClr val="E3E8EC"/>
-                      </a:solidFill>
-                      <a:prstDash val="solid"/>
-                      <a:round/>
-                      <a:headEnd type="none" w="med" len="med"/>
-                      <a:tailEnd type="none" w="med" len="med"/>
-                    </a:lnT>
-                    <a:lnB w="9525" cap="flat" cmpd="sng" algn="ctr">
-                      <a:solidFill>
-                        <a:srgbClr val="E3E8EC"/>
-                      </a:solidFill>
-                      <a:prstDash val="solid"/>
-                      <a:round/>
-                      <a:headEnd type="none" w="med" len="med"/>
-                      <a:tailEnd type="none" w="med" len="med"/>
-                    </a:lnB>
-                    <a:solidFill>
-                      <a:srgbClr val="FFFFFF"/>
-                    </a:solidFill>
-                  </a:tcPr>
-                </a:tc>
-              </a:tr>
-              <a:tr h="822960">
-                <a:tc>
-                  <a:txBody>
-                    <a:bodyPr/>
-                    <a:lstStyle/>
-                    <a:p>
-                      <a:pPr indent="0" marL="0">
-                        <a:buNone/>
-                      </a:pPr>
-                      <a:r>
-                        <a:rPr lang="en-US" sz="1000" b="1" dirty="0">
-                          <a:solidFill>
-                            <a:srgbClr val="1F2937"/>
-                          </a:solidFill>
-                          <a:latin typeface="Calibri" pitchFamily="34" charset="0"/>
-                          <a:ea typeface="Calibri" pitchFamily="34" charset="-122"/>
-                          <a:cs typeface="Calibri" pitchFamily="34" charset="-120"/>
-                        </a:rPr>
-                        <a:t>Scalability</a:t>
-                      </a:r>
-                      <a:endParaRPr lang="en-US" sz="1000" dirty="0">
-                        <a:latin typeface="Calibri" charset="0"/>
-                        <a:ea typeface="Calibri" charset="0"/>
-                        <a:cs typeface="Calibri" charset="0"/>
-                      </a:endParaRPr>
-                    </a:p>
-                  </a:txBody>
-                  <a:tcPr marL="91440" marR="91440" marT="45720" marB="45720" anchor="ctr">
-                    <a:lnL w="9525" cap="flat" cmpd="sng" algn="ctr">
-                      <a:solidFill>
-                        <a:srgbClr val="E3E8EC"/>
-                      </a:solidFill>
-                      <a:prstDash val="solid"/>
-                      <a:round/>
-                      <a:headEnd type="none" w="med" len="med"/>
-                      <a:tailEnd type="none" w="med" len="med"/>
-                    </a:lnL>
-                    <a:lnR w="9525" cap="flat" cmpd="sng" algn="ctr">
-                      <a:solidFill>
-                        <a:srgbClr val="E3E8EC"/>
-                      </a:solidFill>
-                      <a:prstDash val="solid"/>
-                      <a:round/>
-                      <a:headEnd type="none" w="med" len="med"/>
-                      <a:tailEnd type="none" w="med" len="med"/>
-                    </a:lnR>
-                    <a:lnT w="9525" cap="flat" cmpd="sng" algn="ctr">
-                      <a:solidFill>
-                        <a:srgbClr val="E3E8EC"/>
-                      </a:solidFill>
-                      <a:prstDash val="solid"/>
-                      <a:round/>
-                      <a:headEnd type="none" w="med" len="med"/>
-                      <a:tailEnd type="none" w="med" len="med"/>
-                    </a:lnT>
-                    <a:lnB w="9525" cap="flat" cmpd="sng" algn="ctr">
-                      <a:solidFill>
-                        <a:srgbClr val="E3E8EC"/>
-                      </a:solidFill>
-                      <a:prstDash val="solid"/>
-                      <a:round/>
-                      <a:headEnd type="none" w="med" len="med"/>
-                      <a:tailEnd type="none" w="med" len="med"/>
-                    </a:lnB>
-                    <a:solidFill>
-                      <a:srgbClr val="F3F6F8"/>
-                    </a:solidFill>
-                  </a:tcPr>
-                </a:tc>
-                <a:tc>
-                  <a:txBody>
-                    <a:bodyPr/>
-                    <a:lstStyle/>
-                    <a:p>
-                      <a:pPr indent="0" marL="0">
-                        <a:buNone/>
-                      </a:pPr>
-                      <a:r>
-                        <a:rPr lang="en-US" sz="1000" dirty="0">
-                          <a:solidFill>
-                            <a:srgbClr val="1F2937"/>
-                          </a:solidFill>
-                          <a:latin typeface="Calibri" pitchFamily="34" charset="0"/>
-                          <a:ea typeface="Calibri" pitchFamily="34" charset="-122"/>
-                          <a:cs typeface="Calibri" pitchFamily="34" charset="-120"/>
-                        </a:rPr>
-                        <a:t>Not built for real-time runtime supervision</a:t>
-                      </a:r>
-                      <a:endParaRPr lang="en-US" sz="1000" dirty="0">
-                        <a:latin typeface="Calibri" charset="0"/>
-                        <a:ea typeface="Calibri" charset="0"/>
-                        <a:cs typeface="Calibri" charset="0"/>
-                      </a:endParaRPr>
-                    </a:p>
-                  </a:txBody>
-                  <a:tcPr marL="91440" marR="91440" marT="45720" marB="45720" anchor="ctr">
-                    <a:lnL w="9525" cap="flat" cmpd="sng" algn="ctr">
-                      <a:solidFill>
-                        <a:srgbClr val="E3E8EC"/>
-                      </a:solidFill>
-                      <a:prstDash val="solid"/>
-                      <a:round/>
-                      <a:headEnd type="none" w="med" len="med"/>
-                      <a:tailEnd type="none" w="med" len="med"/>
-                    </a:lnL>
-                    <a:lnR w="9525" cap="flat" cmpd="sng" algn="ctr">
-                      <a:solidFill>
-                        <a:srgbClr val="E3E8EC"/>
-                      </a:solidFill>
-                      <a:prstDash val="solid"/>
-                      <a:round/>
-                      <a:headEnd type="none" w="med" len="med"/>
-                      <a:tailEnd type="none" w="med" len="med"/>
-                    </a:lnR>
-                    <a:lnT w="9525" cap="flat" cmpd="sng" algn="ctr">
-                      <a:solidFill>
-                        <a:srgbClr val="E3E8EC"/>
-                      </a:solidFill>
-                      <a:prstDash val="solid"/>
-                      <a:round/>
-                      <a:headEnd type="none" w="med" len="med"/>
-                      <a:tailEnd type="none" w="med" len="med"/>
-                    </a:lnT>
-                    <a:lnB w="9525" cap="flat" cmpd="sng" algn="ctr">
-                      <a:solidFill>
-                        <a:srgbClr val="E3E8EC"/>
-                      </a:solidFill>
-                      <a:prstDash val="solid"/>
-                      <a:round/>
-                      <a:headEnd type="none" w="med" len="med"/>
-                      <a:tailEnd type="none" w="med" len="med"/>
-                    </a:lnB>
-                    <a:solidFill>
-                      <a:srgbClr val="F3F6F8"/>
-                    </a:solidFill>
-                  </a:tcPr>
-                </a:tc>
-                <a:tc>
-                  <a:txBody>
-                    <a:bodyPr/>
-                    <a:lstStyle/>
-                    <a:p>
-                      <a:pPr indent="0" marL="0">
-                        <a:buNone/>
-                      </a:pPr>
-                      <a:r>
-                        <a:rPr lang="en-US" sz="1000" dirty="0">
-                          <a:solidFill>
-                            <a:srgbClr val="1F2937"/>
+                            <a:srgbClr val="6B7280"/>
                           </a:solidFill>
                           <a:latin typeface="Calibri" pitchFamily="34" charset="0"/>
                           <a:ea typeface="Calibri" pitchFamily="34" charset="-122"/>
@@ -14313,9 +13479,9 @@
                         <a:buNone/>
                       </a:pPr>
                       <a:r>
-                        <a:rPr lang="en-US" sz="1000" dirty="0">
+                        <a:rPr lang="en-US" sz="1050" dirty="0">
                           <a:solidFill>
-                            <a:srgbClr val="1F2937"/>
+                            <a:srgbClr val="FFFFFF"/>
                           </a:solidFill>
                           <a:latin typeface="Calibri" pitchFamily="34" charset="0"/>
                           <a:ea typeface="Calibri" pitchFamily="34" charset="-122"/>
@@ -14323,7 +13489,7 @@
                         </a:rPr>
                         <a:t>Purpose-built for kill-switch/streaming/audit</a:t>
                       </a:r>
-                      <a:endParaRPr lang="en-US" sz="1000" dirty="0">
+                      <a:endParaRPr lang="en-US" sz="1050" dirty="0">
                         <a:latin typeface="Calibri" charset="0"/>
                         <a:ea typeface="Calibri" charset="0"/>
                         <a:cs typeface="Calibri" charset="0"/>
@@ -14368,7 +13534,7 @@
                       <a:tailEnd type="none" w="med" len="med"/>
                     </a:lnB>
                     <a:solidFill>
-                      <a:srgbClr val="F3F6F8"/>
+                      <a:srgbClr val="0A2A43"/>
                     </a:solidFill>
                   </a:tcPr>
                 </a:tc>
@@ -14379,7 +13545,7 @@
       </p:graphicFrame>
       <p:sp>
         <p:nvSpPr>
-          <p:cNvPr id="5" name="Text 2"/>
+          <p:cNvPr id="7" name="Text 4"/>
           <p:cNvSpPr/>
           <p:nvPr/>
         </p:nvSpPr>
@@ -14418,7 +13584,7 @@
       </p:sp>
       <p:sp>
         <p:nvSpPr>
-          <p:cNvPr id="6" name="Text 3"/>
+          <p:cNvPr id="8" name="Text 5"/>
           <p:cNvSpPr/>
           <p:nvPr/>
         </p:nvSpPr>

--- a/docs/EGPA-Overview.pptx
+++ b/docs/EGPA-Overview.pptx
@@ -11608,7 +11608,7 @@
           </p:nvPr>
         </p:nvGraphicFramePr>
         <p:xfrm>
-          <a:off x="457200" y="1298448"/>
+          <a:off x="457200" y="1280160"/>
           <a:ext cx="11274552" cy="914400"/>
         </p:xfrm>
         <a:graphic>
@@ -11621,7 +11621,7 @@
                 <a:gridCol w="2514600"/>
                 <a:gridCol w="4416552"/>
               </a:tblGrid>
-              <a:tr h="457200">
+              <a:tr h="420624">
                 <a:tc>
                   <a:txBody>
                     <a:bodyPr/>
@@ -11895,7 +11895,7 @@
                   </a:tcPr>
                 </a:tc>
               </a:tr>
-              <a:tr h="685800">
+              <a:tr h="640080">
                 <a:tc>
                   <a:txBody>
                     <a:bodyPr/>
@@ -12169,7 +12169,7 @@
                   </a:tcPr>
                 </a:tc>
               </a:tr>
-              <a:tr h="685800">
+              <a:tr h="640080">
                 <a:tc>
                   <a:txBody>
                     <a:bodyPr/>
@@ -12443,7 +12443,7 @@
                   </a:tcPr>
                 </a:tc>
               </a:tr>
-              <a:tr h="685800">
+              <a:tr h="640080">
                 <a:tc>
                   <a:txBody>
                     <a:bodyPr/>
@@ -12717,7 +12717,7 @@
                   </a:tcPr>
                 </a:tc>
               </a:tr>
-              <a:tr h="685800">
+              <a:tr h="640080">
                 <a:tc>
                   <a:txBody>
                     <a:bodyPr/>
@@ -12991,7 +12991,281 @@
                   </a:tcPr>
                 </a:tc>
               </a:tr>
-              <a:tr h="685800">
+              <a:tr h="640080">
+                <a:tc>
+                  <a:txBody>
+                    <a:bodyPr/>
+                    <a:lstStyle/>
+                    <a:p>
+                      <a:pPr indent="0" marL="0">
+                        <a:buNone/>
+                      </a:pPr>
+                      <a:r>
+                        <a:rPr lang="en-US" sz="1050" b="1" dirty="0">
+                          <a:solidFill>
+                            <a:srgbClr val="0A2A43"/>
+                          </a:solidFill>
+                          <a:latin typeface="Calibri" pitchFamily="34" charset="0"/>
+                          <a:ea typeface="Calibri" pitchFamily="34" charset="-122"/>
+                          <a:cs typeface="Calibri" pitchFamily="34" charset="-120"/>
+                        </a:rPr>
+                        <a:t>Operational ownership</a:t>
+                      </a:r>
+                      <a:endParaRPr lang="en-US" sz="1050" dirty="0">
+                        <a:latin typeface="Calibri" charset="0"/>
+                        <a:ea typeface="Calibri" charset="0"/>
+                        <a:cs typeface="Calibri" charset="0"/>
+                      </a:endParaRPr>
+                    </a:p>
+                  </a:txBody>
+                  <a:tcPr marL="91440" marR="91440" marT="45720" marB="45720" anchor="ctr">
+                    <a:lnL w="9525" cap="flat" cmpd="sng" algn="ctr">
+                      <a:solidFill>
+                        <a:srgbClr val="E3E8EC"/>
+                      </a:solidFill>
+                      <a:prstDash val="solid"/>
+                      <a:round/>
+                      <a:headEnd type="none" w="med" len="med"/>
+                      <a:tailEnd type="none" w="med" len="med"/>
+                    </a:lnL>
+                    <a:lnR w="9525" cap="flat" cmpd="sng" algn="ctr">
+                      <a:solidFill>
+                        <a:srgbClr val="E3E8EC"/>
+                      </a:solidFill>
+                      <a:prstDash val="solid"/>
+                      <a:round/>
+                      <a:headEnd type="none" w="med" len="med"/>
+                      <a:tailEnd type="none" w="med" len="med"/>
+                    </a:lnR>
+                    <a:lnT w="9525" cap="flat" cmpd="sng" algn="ctr">
+                      <a:solidFill>
+                        <a:srgbClr val="E3E8EC"/>
+                      </a:solidFill>
+                      <a:prstDash val="solid"/>
+                      <a:round/>
+                      <a:headEnd type="none" w="med" len="med"/>
+                      <a:tailEnd type="none" w="med" len="med"/>
+                    </a:lnT>
+                    <a:lnB w="9525" cap="flat" cmpd="sng" algn="ctr">
+                      <a:solidFill>
+                        <a:srgbClr val="E3E8EC"/>
+                      </a:solidFill>
+                      <a:prstDash val="solid"/>
+                      <a:round/>
+                      <a:headEnd type="none" w="med" len="med"/>
+                      <a:tailEnd type="none" w="med" len="med"/>
+                    </a:lnB>
+                    <a:solidFill>
+                      <a:srgbClr val="FFFFFF"/>
+                    </a:solidFill>
+                  </a:tcPr>
+                </a:tc>
+                <a:tc>
+                  <a:txBody>
+                    <a:bodyPr/>
+                    <a:lstStyle/>
+                    <a:p>
+                      <a:pPr indent="0" marL="0">
+                        <a:buNone/>
+                      </a:pPr>
+                      <a:r>
+                        <a:rPr lang="en-US" sz="1000" dirty="0">
+                          <a:solidFill>
+                            <a:srgbClr val="6B7280"/>
+                          </a:solidFill>
+                          <a:latin typeface="Calibri" pitchFamily="34" charset="0"/>
+                          <a:ea typeface="Calibri" pitchFamily="34" charset="-122"/>
+                          <a:cs typeface="Calibri" pitchFamily="34" charset="-120"/>
+                        </a:rPr>
+                        <a:t>Existing GRC/ITSM team — no new team required</a:t>
+                      </a:r>
+                      <a:endParaRPr lang="en-US" sz="1000" dirty="0">
+                        <a:latin typeface="Calibri" charset="0"/>
+                        <a:ea typeface="Calibri" charset="0"/>
+                        <a:cs typeface="Calibri" charset="0"/>
+                      </a:endParaRPr>
+                    </a:p>
+                  </a:txBody>
+                  <a:tcPr marL="91440" marR="91440" marT="45720" marB="45720" anchor="ctr">
+                    <a:lnL w="9525" cap="flat" cmpd="sng" algn="ctr">
+                      <a:solidFill>
+                        <a:srgbClr val="E3E8EC"/>
+                      </a:solidFill>
+                      <a:prstDash val="solid"/>
+                      <a:round/>
+                      <a:headEnd type="none" w="med" len="med"/>
+                      <a:tailEnd type="none" w="med" len="med"/>
+                    </a:lnL>
+                    <a:lnR w="9525" cap="flat" cmpd="sng" algn="ctr">
+                      <a:solidFill>
+                        <a:srgbClr val="E3E8EC"/>
+                      </a:solidFill>
+                      <a:prstDash val="solid"/>
+                      <a:round/>
+                      <a:headEnd type="none" w="med" len="med"/>
+                      <a:tailEnd type="none" w="med" len="med"/>
+                    </a:lnR>
+                    <a:lnT w="9525" cap="flat" cmpd="sng" algn="ctr">
+                      <a:solidFill>
+                        <a:srgbClr val="E3E8EC"/>
+                      </a:solidFill>
+                      <a:prstDash val="solid"/>
+                      <a:round/>
+                      <a:headEnd type="none" w="med" len="med"/>
+                      <a:tailEnd type="none" w="med" len="med"/>
+                    </a:lnT>
+                    <a:lnB w="9525" cap="flat" cmpd="sng" algn="ctr">
+                      <a:solidFill>
+                        <a:srgbClr val="E3E8EC"/>
+                      </a:solidFill>
+                      <a:prstDash val="solid"/>
+                      <a:round/>
+                      <a:headEnd type="none" w="med" len="med"/>
+                      <a:tailEnd type="none" w="med" len="med"/>
+                    </a:lnB>
+                    <a:solidFill>
+                      <a:srgbClr val="FFFFFF"/>
+                    </a:solidFill>
+                  </a:tcPr>
+                </a:tc>
+                <a:tc>
+                  <a:txBody>
+                    <a:bodyPr/>
+                    <a:lstStyle/>
+                    <a:p>
+                      <a:pPr indent="0" marL="0">
+                        <a:buNone/>
+                      </a:pPr>
+                      <a:r>
+                        <a:rPr lang="en-US" sz="1000" dirty="0">
+                          <a:solidFill>
+                            <a:srgbClr val="6B7280"/>
+                          </a:solidFill>
+                          <a:latin typeface="Calibri" pitchFamily="34" charset="0"/>
+                          <a:ea typeface="Calibri" pitchFamily="34" charset="-122"/>
+                          <a:cs typeface="Calibri" pitchFamily="34" charset="-120"/>
+                        </a:rPr>
+                        <a:t>Vendor owns the product; we own configuration + risk mapping</a:t>
+                      </a:r>
+                      <a:endParaRPr lang="en-US" sz="1000" dirty="0">
+                        <a:latin typeface="Calibri" charset="0"/>
+                        <a:ea typeface="Calibri" charset="0"/>
+                        <a:cs typeface="Calibri" charset="0"/>
+                      </a:endParaRPr>
+                    </a:p>
+                  </a:txBody>
+                  <a:tcPr marL="91440" marR="91440" marT="45720" marB="45720" anchor="ctr">
+                    <a:lnL w="9525" cap="flat" cmpd="sng" algn="ctr">
+                      <a:solidFill>
+                        <a:srgbClr val="E3E8EC"/>
+                      </a:solidFill>
+                      <a:prstDash val="solid"/>
+                      <a:round/>
+                      <a:headEnd type="none" w="med" len="med"/>
+                      <a:tailEnd type="none" w="med" len="med"/>
+                    </a:lnL>
+                    <a:lnR w="9525" cap="flat" cmpd="sng" algn="ctr">
+                      <a:solidFill>
+                        <a:srgbClr val="E3E8EC"/>
+                      </a:solidFill>
+                      <a:prstDash val="solid"/>
+                      <a:round/>
+                      <a:headEnd type="none" w="med" len="med"/>
+                      <a:tailEnd type="none" w="med" len="med"/>
+                    </a:lnR>
+                    <a:lnT w="9525" cap="flat" cmpd="sng" algn="ctr">
+                      <a:solidFill>
+                        <a:srgbClr val="E3E8EC"/>
+                      </a:solidFill>
+                      <a:prstDash val="solid"/>
+                      <a:round/>
+                      <a:headEnd type="none" w="med" len="med"/>
+                      <a:tailEnd type="none" w="med" len="med"/>
+                    </a:lnT>
+                    <a:lnB w="9525" cap="flat" cmpd="sng" algn="ctr">
+                      <a:solidFill>
+                        <a:srgbClr val="E3E8EC"/>
+                      </a:solidFill>
+                      <a:prstDash val="solid"/>
+                      <a:round/>
+                      <a:headEnd type="none" w="med" len="med"/>
+                      <a:tailEnd type="none" w="med" len="med"/>
+                    </a:lnB>
+                    <a:solidFill>
+                      <a:srgbClr val="FFFFFF"/>
+                    </a:solidFill>
+                  </a:tcPr>
+                </a:tc>
+                <a:tc>
+                  <a:txBody>
+                    <a:bodyPr/>
+                    <a:lstStyle/>
+                    <a:p>
+                      <a:pPr indent="0" marL="0">
+                        <a:buNone/>
+                      </a:pPr>
+                      <a:r>
+                        <a:rPr lang="en-US" sz="1050" dirty="0">
+                          <a:solidFill>
+                            <a:srgbClr val="FFFFFF"/>
+                          </a:solidFill>
+                          <a:latin typeface="Calibri" pitchFamily="34" charset="0"/>
+                          <a:ea typeface="Calibri" pitchFamily="34" charset="-122"/>
+                          <a:cs typeface="Calibri" pitchFamily="34" charset="-120"/>
+                        </a:rPr>
+                        <a:t>New internal platform team — built and run by us, long-term</a:t>
+                      </a:r>
+                      <a:endParaRPr lang="en-US" sz="1050" dirty="0">
+                        <a:latin typeface="Calibri" charset="0"/>
+                        <a:ea typeface="Calibri" charset="0"/>
+                        <a:cs typeface="Calibri" charset="0"/>
+                      </a:endParaRPr>
+                    </a:p>
+                  </a:txBody>
+                  <a:tcPr marL="91440" marR="91440" marT="45720" marB="45720" anchor="ctr">
+                    <a:lnL w="9525" cap="flat" cmpd="sng" algn="ctr">
+                      <a:solidFill>
+                        <a:srgbClr val="E3E8EC"/>
+                      </a:solidFill>
+                      <a:prstDash val="solid"/>
+                      <a:round/>
+                      <a:headEnd type="none" w="med" len="med"/>
+                      <a:tailEnd type="none" w="med" len="med"/>
+                    </a:lnL>
+                    <a:lnR w="9525" cap="flat" cmpd="sng" algn="ctr">
+                      <a:solidFill>
+                        <a:srgbClr val="E3E8EC"/>
+                      </a:solidFill>
+                      <a:prstDash val="solid"/>
+                      <a:round/>
+                      <a:headEnd type="none" w="med" len="med"/>
+                      <a:tailEnd type="none" w="med" len="med"/>
+                    </a:lnR>
+                    <a:lnT w="9525" cap="flat" cmpd="sng" algn="ctr">
+                      <a:solidFill>
+                        <a:srgbClr val="E3E8EC"/>
+                      </a:solidFill>
+                      <a:prstDash val="solid"/>
+                      <a:round/>
+                      <a:headEnd type="none" w="med" len="med"/>
+                      <a:tailEnd type="none" w="med" len="med"/>
+                    </a:lnT>
+                    <a:lnB w="9525" cap="flat" cmpd="sng" algn="ctr">
+                      <a:solidFill>
+                        <a:srgbClr val="E3E8EC"/>
+                      </a:solidFill>
+                      <a:prstDash val="solid"/>
+                      <a:round/>
+                      <a:headEnd type="none" w="med" len="med"/>
+                      <a:tailEnd type="none" w="med" len="med"/>
+                    </a:lnB>
+                    <a:solidFill>
+                      <a:srgbClr val="0A2A43"/>
+                    </a:solidFill>
+                  </a:tcPr>
+                </a:tc>
+              </a:tr>
+              <a:tr h="640080">
                 <a:tc>
                   <a:txBody>
                     <a:bodyPr/>
@@ -13056,7 +13330,7 @@
                       <a:tailEnd type="none" w="med" len="med"/>
                     </a:lnB>
                     <a:solidFill>
-                      <a:srgbClr val="FFFFFF"/>
+                      <a:srgbClr val="F3F6F8"/>
                     </a:solidFill>
                   </a:tcPr>
                 </a:tc>
@@ -13124,7 +13398,7 @@
                       <a:tailEnd type="none" w="med" len="med"/>
                     </a:lnB>
                     <a:solidFill>
-                      <a:srgbClr val="FFFFFF"/>
+                      <a:srgbClr val="F3F6F8"/>
                     </a:solidFill>
                   </a:tcPr>
                 </a:tc>
@@ -13192,7 +13466,7 @@
                       <a:tailEnd type="none" w="med" len="med"/>
                     </a:lnB>
                     <a:solidFill>
-                      <a:srgbClr val="FFFFFF"/>
+                      <a:srgbClr val="F3F6F8"/>
                     </a:solidFill>
                   </a:tcPr>
                 </a:tc>
@@ -13265,7 +13539,7 @@
                   </a:tcPr>
                 </a:tc>
               </a:tr>
-              <a:tr h="685800">
+              <a:tr h="640080">
                 <a:tc>
                   <a:txBody>
                     <a:bodyPr/>
@@ -13330,7 +13604,7 @@
                       <a:tailEnd type="none" w="med" len="med"/>
                     </a:lnB>
                     <a:solidFill>
-                      <a:srgbClr val="F3F6F8"/>
+                      <a:srgbClr val="FFFFFF"/>
                     </a:solidFill>
                   </a:tcPr>
                 </a:tc>
@@ -13398,7 +13672,7 @@
                       <a:tailEnd type="none" w="med" len="med"/>
                     </a:lnB>
                     <a:solidFill>
-                      <a:srgbClr val="F3F6F8"/>
+                      <a:srgbClr val="FFFFFF"/>
                     </a:solidFill>
                   </a:tcPr>
                 </a:tc>
@@ -13466,7 +13740,7 @@
                       <a:tailEnd type="none" w="med" len="med"/>
                     </a:lnB>
                     <a:solidFill>
-                      <a:srgbClr val="F3F6F8"/>
+                      <a:srgbClr val="FFFFFF"/>
                     </a:solidFill>
                   </a:tcPr>
                 </a:tc>
